--- a/slides/06-aula06/aula06_arvores_de_decisao.pptx
+++ b/slides/06-aula06/aula06_arvores_de_decisao.pptx
@@ -4536,373 +4536,6 @@
           </a:p>
         </p:txBody>
       </p:sp>
-      <mc:AlternateContent xmlns:mc="http://schemas.openxmlformats.org/markup-compatibility/2006" xmlns:a14="http://schemas.microsoft.com/office/drawing/2010/main">
-        <mc:Choice Requires="a14">
-          <p:sp>
-            <p:nvSpPr>
-              <p:cNvPr id="13" name="Shape 6"/>
-              <p:cNvSpPr/>
-              <p:nvPr/>
-            </p:nvSpPr>
-            <p:spPr>
-              <a:xfrm>
-                <a:off x="570451" y="3217505"/>
-                <a:ext cx="10592023" cy="498136"/>
-              </a:xfrm>
-              <a:prstGeom prst="roundRect">
-                <a:avLst>
-                  <a:gd name="adj" fmla="val 9412"/>
-                </a:avLst>
-              </a:prstGeom>
-              <a:solidFill>
-                <a:srgbClr val="132F55"/>
-              </a:solidFill>
-              <a:ln w="15240">
-                <a:solidFill>
-                  <a:srgbClr val="4DA3FF"/>
-                </a:solidFill>
-                <a:round/>
-              </a:ln>
-            </p:spPr>
-            <p:style>
-              <a:lnRef idx="0">
-                <a:scrgbClr r="0" g="0" b="0"/>
-              </a:lnRef>
-              <a:fillRef idx="0">
-                <a:scrgbClr r="0" g="0" b="0"/>
-              </a:fillRef>
-              <a:effectRef idx="0">
-                <a:scrgbClr r="0" g="0" b="0"/>
-              </a:effectRef>
-              <a:fontRef idx="minor"/>
-            </p:style>
-            <p:txBody>
-              <a:bodyPr lIns="90000" tIns="45000" rIns="90000" bIns="45000" anchor="t">
-                <a:noAutofit/>
-              </a:bodyPr>
-              <a:lstStyle/>
-              <a:p>
-                <a:pPr lvl="0"/>
-                <a14:m>
-                  <m:oMathPara xmlns:m="http://schemas.openxmlformats.org/officeDocument/2006/math">
-                    <m:oMathParaPr>
-                      <m:jc m:val="centerGroup"/>
-                    </m:oMathParaPr>
-                    <m:oMath xmlns:m="http://schemas.openxmlformats.org/officeDocument/2006/math">
-                      <m:r>
-                        <a:rPr kumimoji="0" lang="pt-BR" sz="2400" b="0" i="1" u="none" strike="noStrike" kern="1200" cap="none" spc="0" normalizeH="0" baseline="0" noProof="0" smtClean="0">
-                          <a:ln>
-                            <a:noFill/>
-                          </a:ln>
-                          <a:solidFill>
-                            <a:srgbClr val="FFFF00"/>
-                          </a:solidFill>
-                          <a:effectLst/>
-                          <a:uLnTx/>
-                          <a:uFillTx/>
-                          <a:latin typeface="Cambria Math" panose="02040503050406030204" pitchFamily="18" charset="0"/>
-                          <a:ea typeface="+mn-ea"/>
-                          <a:cs typeface="+mn-cs"/>
-                        </a:rPr>
-                        <m:t>𝐸𝑁𝑇𝑅𝐴𝐷𝐴</m:t>
-                      </m:r>
-                      <m:r>
-                        <a:rPr kumimoji="0" lang="pt-BR" sz="2400" b="0" i="1" u="none" strike="noStrike" kern="1200" cap="none" spc="0" normalizeH="0" baseline="0" noProof="0" smtClean="0">
-                          <a:ln>
-                            <a:noFill/>
-                          </a:ln>
-                          <a:solidFill>
-                            <a:srgbClr val="FFFF00"/>
-                          </a:solidFill>
-                          <a:effectLst/>
-                          <a:uLnTx/>
-                          <a:uFillTx/>
-                          <a:latin typeface="Cambria Math" panose="02040503050406030204" pitchFamily="18" charset="0"/>
-                          <a:ea typeface="+mn-ea"/>
-                          <a:cs typeface="+mn-cs"/>
-                        </a:rPr>
-                        <m:t> </m:t>
-                      </m:r>
-                      <m:r>
-                        <a:rPr kumimoji="0" lang="pt-BR" sz="2400" b="0" i="1" u="none" strike="noStrike" kern="1200" cap="none" spc="0" normalizeH="0" baseline="0" noProof="0" smtClean="0">
-                          <a:ln>
-                            <a:noFill/>
-                          </a:ln>
-                          <a:solidFill>
-                            <a:srgbClr val="FFFF00"/>
-                          </a:solidFill>
-                          <a:effectLst/>
-                          <a:uLnTx/>
-                          <a:uFillTx/>
-                          <a:latin typeface="Cambria Math" panose="02040503050406030204" pitchFamily="18" charset="0"/>
-                          <a:ea typeface="+mn-ea"/>
-                          <a:cs typeface="+mn-cs"/>
-                        </a:rPr>
-                        <m:t>𝐶𝑂𝑁𝐻𝐸𝐶𝐼𝐷𝐴</m:t>
-                      </m:r>
-                      <m:r>
-                        <a:rPr kumimoji="0" lang="pt-BR" sz="2400" b="0" i="1" u="none" strike="noStrike" kern="1200" cap="none" spc="0" normalizeH="0" baseline="0" noProof="0" smtClean="0">
-                          <a:ln>
-                            <a:noFill/>
-                          </a:ln>
-                          <a:solidFill>
-                            <a:srgbClr val="FFFFFF"/>
-                          </a:solidFill>
-                          <a:effectLst/>
-                          <a:uLnTx/>
-                          <a:uFillTx/>
-                          <a:latin typeface="Cambria Math" panose="02040503050406030204" pitchFamily="18" charset="0"/>
-                          <a:ea typeface="+mn-ea"/>
-                          <a:cs typeface="+mn-cs"/>
-                        </a:rPr>
-                        <m:t>⇒</m:t>
-                      </m:r>
-                      <m:r>
-                        <a:rPr kumimoji="0" lang="pt-BR" sz="2400" b="0" i="1" u="none" strike="noStrike" kern="1200" cap="none" spc="0" normalizeH="0" baseline="0" noProof="0" smtClean="0">
-                          <a:ln>
-                            <a:noFill/>
-                          </a:ln>
-                          <a:solidFill>
-                            <a:srgbClr val="FFFFFF"/>
-                          </a:solidFill>
-                          <a:effectLst/>
-                          <a:uLnTx/>
-                          <a:uFillTx/>
-                          <a:latin typeface="Cambria Math" panose="02040503050406030204" pitchFamily="18" charset="0"/>
-                          <a:ea typeface="+mn-ea"/>
-                          <a:cs typeface="+mn-cs"/>
-                        </a:rPr>
-                        <m:t>𝑇𝑅𝐸𝐼𝑁𝑂</m:t>
-                      </m:r>
-                      <m:r>
-                        <a:rPr kumimoji="0" lang="pt-BR" sz="2400" b="0" i="1" u="none" strike="noStrike" kern="1200" cap="none" spc="0" normalizeH="0" baseline="0" noProof="0" smtClean="0">
-                          <a:ln>
-                            <a:noFill/>
-                          </a:ln>
-                          <a:solidFill>
-                            <a:srgbClr val="FFFFFF"/>
-                          </a:solidFill>
-                          <a:effectLst/>
-                          <a:uLnTx/>
-                          <a:uFillTx/>
-                          <a:latin typeface="Cambria Math" panose="02040503050406030204" pitchFamily="18" charset="0"/>
-                          <a:ea typeface="+mn-ea"/>
-                          <a:cs typeface="+mn-cs"/>
-                        </a:rPr>
-                        <m:t>⇒</m:t>
-                      </m:r>
-                      <m:r>
-                        <a:rPr kumimoji="0" lang="pt-BR" sz="2400" b="0" i="1" u="none" strike="noStrike" kern="1200" cap="none" spc="0" normalizeH="0" baseline="0" noProof="0" smtClean="0">
-                          <a:ln>
-                            <a:noFill/>
-                          </a:ln>
-                          <a:solidFill>
-                            <a:srgbClr val="FFFF00"/>
-                          </a:solidFill>
-                          <a:effectLst/>
-                          <a:uLnTx/>
-                          <a:uFillTx/>
-                          <a:latin typeface="Cambria Math" panose="02040503050406030204" pitchFamily="18" charset="0"/>
-                          <a:ea typeface="+mn-ea"/>
-                          <a:cs typeface="+mn-cs"/>
-                        </a:rPr>
-                        <m:t>𝑆𝐴</m:t>
-                      </m:r>
-                      <m:r>
-                        <a:rPr kumimoji="0" lang="pt-BR" sz="2400" b="0" i="1" u="none" strike="noStrike" kern="1200" cap="none" spc="0" normalizeH="0" baseline="0" noProof="0" smtClean="0">
-                          <a:ln>
-                            <a:noFill/>
-                          </a:ln>
-                          <a:solidFill>
-                            <a:srgbClr val="FFFF00"/>
-                          </a:solidFill>
-                          <a:effectLst/>
-                          <a:uLnTx/>
-                          <a:uFillTx/>
-                          <a:latin typeface="Cambria Math" panose="02040503050406030204" pitchFamily="18" charset="0"/>
-                          <a:ea typeface="+mn-ea"/>
-                          <a:cs typeface="+mn-cs"/>
-                        </a:rPr>
-                        <m:t>Í</m:t>
-                      </m:r>
-                      <m:r>
-                        <a:rPr kumimoji="0" lang="pt-BR" sz="2400" b="0" i="1" u="none" strike="noStrike" kern="1200" cap="none" spc="0" normalizeH="0" baseline="0" noProof="0" smtClean="0">
-                          <a:ln>
-                            <a:noFill/>
-                          </a:ln>
-                          <a:solidFill>
-                            <a:srgbClr val="FFFF00"/>
-                          </a:solidFill>
-                          <a:effectLst/>
-                          <a:uLnTx/>
-                          <a:uFillTx/>
-                          <a:latin typeface="Cambria Math" panose="02040503050406030204" pitchFamily="18" charset="0"/>
-                          <a:ea typeface="+mn-ea"/>
-                          <a:cs typeface="+mn-cs"/>
-                        </a:rPr>
-                        <m:t>𝐷𝐴</m:t>
-                      </m:r>
-                      <m:r>
-                        <a:rPr kumimoji="0" lang="pt-BR" sz="2400" b="0" i="1" u="none" strike="noStrike" kern="1200" cap="none" spc="0" normalizeH="0" baseline="0" noProof="0" smtClean="0">
-                          <a:ln>
-                            <a:noFill/>
-                          </a:ln>
-                          <a:solidFill>
-                            <a:srgbClr val="FFFF00"/>
-                          </a:solidFill>
-                          <a:effectLst/>
-                          <a:uLnTx/>
-                          <a:uFillTx/>
-                          <a:latin typeface="Cambria Math" panose="02040503050406030204" pitchFamily="18" charset="0"/>
-                          <a:ea typeface="+mn-ea"/>
-                          <a:cs typeface="+mn-cs"/>
-                        </a:rPr>
-                        <m:t> </m:t>
-                      </m:r>
-                      <m:r>
-                        <a:rPr kumimoji="0" lang="pt-BR" sz="2400" b="0" i="1" u="none" strike="noStrike" kern="1200" cap="none" spc="0" normalizeH="0" baseline="0" noProof="0" smtClean="0">
-                          <a:ln>
-                            <a:noFill/>
-                          </a:ln>
-                          <a:solidFill>
-                            <a:srgbClr val="FFFF00"/>
-                          </a:solidFill>
-                          <a:effectLst/>
-                          <a:uLnTx/>
-                          <a:uFillTx/>
-                          <a:latin typeface="Cambria Math" panose="02040503050406030204" pitchFamily="18" charset="0"/>
-                          <a:ea typeface="+mn-ea"/>
-                          <a:cs typeface="+mn-cs"/>
-                        </a:rPr>
-                        <m:t>𝐶𝑂𝑁𝐻𝐸𝐶𝐼𝐷𝐴</m:t>
-                      </m:r>
-                    </m:oMath>
-                  </m:oMathPara>
-                </a14:m>
-                <a:endParaRPr kumimoji="0" lang="pt-BR" sz="2400" b="0" i="0" u="none" strike="noStrike" kern="1200" cap="none" spc="0" normalizeH="0" baseline="0" noProof="0" dirty="0">
-                  <a:ln>
-                    <a:noFill/>
-                  </a:ln>
-                  <a:solidFill>
-                    <a:srgbClr val="FFFF00"/>
-                  </a:solidFill>
-                  <a:effectLst/>
-                  <a:uLnTx/>
-                  <a:uFillTx/>
-                  <a:latin typeface="Arial"/>
-                  <a:ea typeface="+mn-ea"/>
-                  <a:cs typeface="+mn-cs"/>
-                </a:endParaRPr>
-              </a:p>
-            </p:txBody>
-          </p:sp>
-        </mc:Choice>
-        <mc:Fallback xmlns="">
-          <p:sp>
-            <p:nvSpPr>
-              <p:cNvPr id="13" name="Shape 6"/>
-              <p:cNvSpPr>
-                <a:spLocks noRot="1" noChangeAspect="1" noMove="1" noResize="1" noEditPoints="1" noAdjustHandles="1" noChangeArrowheads="1" noChangeShapeType="1" noTextEdit="1"/>
-              </p:cNvSpPr>
-              <p:nvPr/>
-            </p:nvSpPr>
-            <p:spPr>
-              <a:xfrm>
-                <a:off x="570451" y="3217505"/>
-                <a:ext cx="10592023" cy="498136"/>
-              </a:xfrm>
-              <a:prstGeom prst="roundRect">
-                <a:avLst>
-                  <a:gd name="adj" fmla="val 9412"/>
-                </a:avLst>
-              </a:prstGeom>
-              <a:blipFill>
-                <a:blip r:embed="rId3"/>
-                <a:stretch>
-                  <a:fillRect/>
-                </a:stretch>
-              </a:blipFill>
-              <a:ln w="15240">
-                <a:solidFill>
-                  <a:srgbClr val="4DA3FF"/>
-                </a:solidFill>
-                <a:round/>
-              </a:ln>
-            </p:spPr>
-            <p:txBody>
-              <a:bodyPr/>
-              <a:lstStyle/>
-              <a:p>
-                <a:r>
-                  <a:rPr lang="pt-BR">
-                    <a:noFill/>
-                  </a:rPr>
-                  <a:t> </a:t>
-                </a:r>
-              </a:p>
-            </p:txBody>
-          </p:sp>
-        </mc:Fallback>
-      </mc:AlternateContent>
-      <p:sp>
-        <p:nvSpPr>
-          <p:cNvPr id="14" name="Text 7"/>
-          <p:cNvSpPr/>
-          <p:nvPr/>
-        </p:nvSpPr>
-        <p:spPr>
-          <a:xfrm>
-            <a:off x="7551732" y="2632926"/>
-            <a:ext cx="3017160" cy="630720"/>
-          </a:xfrm>
-          <a:prstGeom prst="rect">
-            <a:avLst/>
-          </a:prstGeom>
-          <a:noFill/>
-          <a:ln w="0">
-            <a:noFill/>
-          </a:ln>
-        </p:spPr>
-        <p:style>
-          <a:lnRef idx="0">
-            <a:scrgbClr r="0" g="0" b="0"/>
-          </a:lnRef>
-          <a:fillRef idx="0">
-            <a:scrgbClr r="0" g="0" b="0"/>
-          </a:fillRef>
-          <a:effectRef idx="0">
-            <a:scrgbClr r="0" g="0" b="0"/>
-          </a:effectRef>
-          <a:fontRef idx="minor"/>
-        </p:style>
-        <p:txBody>
-          <a:bodyPr lIns="360" tIns="360" rIns="360" bIns="360" anchor="ctr">
-            <a:normAutofit/>
-          </a:bodyPr>
-          <a:lstStyle/>
-          <a:p>
-            <a:pPr lvl="0" algn="ctr">
-              <a:tabLst>
-                <a:tab pos="0" algn="l"/>
-              </a:tabLst>
-            </a:pPr>
-            <a:endParaRPr kumimoji="0" lang="pt-BR" sz="2800" b="0" i="0" u="none" strike="noStrike" kern="1200" cap="none" spc="0" normalizeH="0" baseline="0" noProof="0" dirty="0">
-              <a:ln>
-                <a:noFill/>
-              </a:ln>
-              <a:solidFill>
-                <a:srgbClr val="FFFFFF"/>
-              </a:solidFill>
-              <a:effectLst/>
-              <a:uLnTx/>
-              <a:uFillTx/>
-              <a:latin typeface="Arial"/>
-              <a:ea typeface="+mn-ea"/>
-              <a:cs typeface="+mn-cs"/>
-            </a:endParaRPr>
-          </a:p>
-        </p:txBody>
-      </p:sp>
       <p:sp>
         <p:nvSpPr>
           <p:cNvPr id="23" name="Text 16"/>
@@ -5154,7 +4787,7 @@
           <p:nvPr/>
         </p:nvPicPr>
         <p:blipFill>
-          <a:blip r:embed="rId4"/>
+          <a:blip r:embed="rId3"/>
           <a:stretch/>
         </p:blipFill>
         <p:spPr>
@@ -5171,326 +4804,36 @@
           </a:ln>
         </p:spPr>
       </p:pic>
-      <mc:AlternateContent xmlns:mc="http://schemas.openxmlformats.org/markup-compatibility/2006" xmlns:a14="http://schemas.microsoft.com/office/drawing/2010/main">
-        <mc:Choice Requires="a14">
-          <p:sp>
-            <p:nvSpPr>
-              <p:cNvPr id="4" name="Shape 6">
-                <a:extLst>
-                  <a:ext uri="{FF2B5EF4-FFF2-40B4-BE49-F238E27FC236}">
-                    <a16:creationId xmlns:a16="http://schemas.microsoft.com/office/drawing/2014/main" id="{19988A39-07FD-ECDD-B085-7D4C968F0B04}"/>
-                  </a:ext>
-                </a:extLst>
-              </p:cNvPr>
-              <p:cNvSpPr/>
-              <p:nvPr/>
-            </p:nvSpPr>
-            <p:spPr>
-              <a:xfrm>
-                <a:off x="570451" y="3957686"/>
-                <a:ext cx="10592023" cy="498136"/>
-              </a:xfrm>
-              <a:prstGeom prst="roundRect">
-                <a:avLst>
-                  <a:gd name="adj" fmla="val 9412"/>
-                </a:avLst>
-              </a:prstGeom>
-              <a:solidFill>
-                <a:srgbClr val="132F55"/>
-              </a:solidFill>
-              <a:ln w="15240">
-                <a:solidFill>
-                  <a:srgbClr val="4DA3FF"/>
-                </a:solidFill>
-                <a:round/>
-              </a:ln>
-            </p:spPr>
-            <p:style>
-              <a:lnRef idx="0">
-                <a:scrgbClr r="0" g="0" b="0"/>
-              </a:lnRef>
-              <a:fillRef idx="0">
-                <a:scrgbClr r="0" g="0" b="0"/>
-              </a:fillRef>
-              <a:effectRef idx="0">
-                <a:scrgbClr r="0" g="0" b="0"/>
-              </a:effectRef>
-              <a:fontRef idx="minor"/>
-            </p:style>
-            <p:txBody>
-              <a:bodyPr lIns="90000" tIns="45000" rIns="90000" bIns="45000" anchor="t">
-                <a:noAutofit/>
-              </a:bodyPr>
-              <a:lstStyle/>
-              <a:p>
-                <a:pPr lvl="0"/>
-                <a14:m>
-                  <m:oMathPara xmlns:m="http://schemas.openxmlformats.org/officeDocument/2006/math">
-                    <m:oMathParaPr>
-                      <m:jc m:val="centerGroup"/>
-                    </m:oMathParaPr>
-                    <m:oMath xmlns:m="http://schemas.openxmlformats.org/officeDocument/2006/math">
-                      <m:r>
-                        <a:rPr kumimoji="0" lang="pt-BR" sz="2400" b="0" i="1" u="none" strike="noStrike" kern="1200" cap="none" spc="0" normalizeH="0" baseline="0" noProof="0" smtClean="0">
-                          <a:ln>
-                            <a:noFill/>
-                          </a:ln>
-                          <a:solidFill>
-                            <a:srgbClr val="E03D3D"/>
-                          </a:solidFill>
-                          <a:effectLst/>
-                          <a:uLnTx/>
-                          <a:uFillTx/>
-                          <a:latin typeface="Cambria Math" panose="02040503050406030204" pitchFamily="18" charset="0"/>
-                          <a:ea typeface="+mn-ea"/>
-                          <a:cs typeface="+mn-cs"/>
-                        </a:rPr>
-                        <m:t>𝐸𝑁𝑇𝑅𝐴𝐷𝐴</m:t>
-                      </m:r>
-                      <m:r>
-                        <a:rPr kumimoji="0" lang="pt-BR" sz="2400" b="0" i="1" u="none" strike="noStrike" kern="1200" cap="none" spc="0" normalizeH="0" baseline="0" noProof="0" smtClean="0">
-                          <a:ln>
-                            <a:noFill/>
-                          </a:ln>
-                          <a:solidFill>
-                            <a:srgbClr val="E03D3D"/>
-                          </a:solidFill>
-                          <a:effectLst/>
-                          <a:uLnTx/>
-                          <a:uFillTx/>
-                          <a:latin typeface="Cambria Math" panose="02040503050406030204" pitchFamily="18" charset="0"/>
-                          <a:ea typeface="+mn-ea"/>
-                          <a:cs typeface="+mn-cs"/>
-                        </a:rPr>
-                        <m:t> </m:t>
-                      </m:r>
-                      <m:r>
-                        <a:rPr kumimoji="0" lang="pt-BR" sz="2400" b="0" i="1" u="none" strike="noStrike" kern="1200" cap="none" spc="0" normalizeH="0" baseline="0" noProof="0" smtClean="0">
-                          <a:ln>
-                            <a:noFill/>
-                          </a:ln>
-                          <a:solidFill>
-                            <a:srgbClr val="E03D3D"/>
-                          </a:solidFill>
-                          <a:effectLst/>
-                          <a:uLnTx/>
-                          <a:uFillTx/>
-                          <a:latin typeface="Cambria Math" panose="02040503050406030204" pitchFamily="18" charset="0"/>
-                          <a:ea typeface="+mn-ea"/>
-                          <a:cs typeface="+mn-cs"/>
-                        </a:rPr>
-                        <m:t>𝐷𝐸𝑆𝐶𝑂𝑁𝐻𝐸𝐶𝐼𝐷𝐴</m:t>
-                      </m:r>
-                      <m:r>
-                        <a:rPr kumimoji="0" lang="pt-BR" sz="2400" b="0" i="1" u="none" strike="noStrike" kern="1200" cap="none" spc="0" normalizeH="0" baseline="0" noProof="0" smtClean="0">
-                          <a:ln>
-                            <a:noFill/>
-                          </a:ln>
-                          <a:solidFill>
-                            <a:srgbClr val="FFFFFF"/>
-                          </a:solidFill>
-                          <a:effectLst/>
-                          <a:uLnTx/>
-                          <a:uFillTx/>
-                          <a:latin typeface="Cambria Math" panose="02040503050406030204" pitchFamily="18" charset="0"/>
-                          <a:ea typeface="+mn-ea"/>
-                          <a:cs typeface="+mn-cs"/>
-                        </a:rPr>
-                        <m:t>⇒</m:t>
-                      </m:r>
-                      <m:r>
-                        <a:rPr kumimoji="0" lang="pt-BR" sz="2400" b="0" i="1" u="none" strike="noStrike" kern="1200" cap="none" spc="0" normalizeH="0" baseline="0" noProof="0" smtClean="0">
-                          <a:ln>
-                            <a:noFill/>
-                          </a:ln>
-                          <a:solidFill>
-                            <a:srgbClr val="FFFFFF"/>
-                          </a:solidFill>
-                          <a:effectLst/>
-                          <a:uLnTx/>
-                          <a:uFillTx/>
-                          <a:latin typeface="Cambria Math" panose="02040503050406030204" pitchFamily="18" charset="0"/>
-                          <a:ea typeface="+mn-ea"/>
-                          <a:cs typeface="+mn-cs"/>
-                        </a:rPr>
-                        <m:t>𝑇𝐸𝑆𝑇𝐸</m:t>
-                      </m:r>
-                      <m:r>
-                        <a:rPr kumimoji="0" lang="pt-BR" sz="2400" b="0" i="1" u="none" strike="noStrike" kern="1200" cap="none" spc="0" normalizeH="0" baseline="0" noProof="0" smtClean="0">
-                          <a:ln>
-                            <a:noFill/>
-                          </a:ln>
-                          <a:solidFill>
-                            <a:srgbClr val="FFFFFF"/>
-                          </a:solidFill>
-                          <a:effectLst/>
-                          <a:uLnTx/>
-                          <a:uFillTx/>
-                          <a:latin typeface="Cambria Math" panose="02040503050406030204" pitchFamily="18" charset="0"/>
-                          <a:ea typeface="+mn-ea"/>
-                          <a:cs typeface="+mn-cs"/>
-                        </a:rPr>
-                        <m:t>⇒</m:t>
-                      </m:r>
-                      <m:r>
-                        <a:rPr kumimoji="0" lang="pt-BR" sz="2400" b="0" i="1" u="none" strike="noStrike" kern="1200" cap="none" spc="0" normalizeH="0" baseline="0" noProof="0" smtClean="0">
-                          <a:ln>
-                            <a:noFill/>
-                          </a:ln>
-                          <a:solidFill>
-                            <a:srgbClr val="E03D3D"/>
-                          </a:solidFill>
-                          <a:effectLst/>
-                          <a:uLnTx/>
-                          <a:uFillTx/>
-                          <a:latin typeface="Cambria Math" panose="02040503050406030204" pitchFamily="18" charset="0"/>
-                          <a:ea typeface="+mn-ea"/>
-                          <a:cs typeface="+mn-cs"/>
-                        </a:rPr>
-                        <m:t>𝑆𝐴</m:t>
-                      </m:r>
-                      <m:r>
-                        <a:rPr kumimoji="0" lang="pt-BR" sz="2400" b="0" i="1" u="none" strike="noStrike" kern="1200" cap="none" spc="0" normalizeH="0" baseline="0" noProof="0" smtClean="0">
-                          <a:ln>
-                            <a:noFill/>
-                          </a:ln>
-                          <a:solidFill>
-                            <a:srgbClr val="E03D3D"/>
-                          </a:solidFill>
-                          <a:effectLst/>
-                          <a:uLnTx/>
-                          <a:uFillTx/>
-                          <a:latin typeface="Cambria Math" panose="02040503050406030204" pitchFamily="18" charset="0"/>
-                          <a:ea typeface="+mn-ea"/>
-                          <a:cs typeface="+mn-cs"/>
-                        </a:rPr>
-                        <m:t>Í</m:t>
-                      </m:r>
-                      <m:r>
-                        <a:rPr kumimoji="0" lang="pt-BR" sz="2400" b="0" i="1" u="none" strike="noStrike" kern="1200" cap="none" spc="0" normalizeH="0" baseline="0" noProof="0" smtClean="0">
-                          <a:ln>
-                            <a:noFill/>
-                          </a:ln>
-                          <a:solidFill>
-                            <a:srgbClr val="E03D3D"/>
-                          </a:solidFill>
-                          <a:effectLst/>
-                          <a:uLnTx/>
-                          <a:uFillTx/>
-                          <a:latin typeface="Cambria Math" panose="02040503050406030204" pitchFamily="18" charset="0"/>
-                          <a:ea typeface="+mn-ea"/>
-                          <a:cs typeface="+mn-cs"/>
-                        </a:rPr>
-                        <m:t>𝐷𝐴</m:t>
-                      </m:r>
-                      <m:r>
-                        <a:rPr kumimoji="0" lang="pt-BR" sz="2400" b="0" i="1" u="none" strike="noStrike" kern="1200" cap="none" spc="0" normalizeH="0" baseline="0" noProof="0" smtClean="0">
-                          <a:ln>
-                            <a:noFill/>
-                          </a:ln>
-                          <a:solidFill>
-                            <a:srgbClr val="E03D3D"/>
-                          </a:solidFill>
-                          <a:effectLst/>
-                          <a:uLnTx/>
-                          <a:uFillTx/>
-                          <a:latin typeface="Cambria Math" panose="02040503050406030204" pitchFamily="18" charset="0"/>
-                          <a:ea typeface="+mn-ea"/>
-                          <a:cs typeface="+mn-cs"/>
-                        </a:rPr>
-                        <m:t> </m:t>
-                      </m:r>
-                      <m:r>
-                        <a:rPr kumimoji="0" lang="pt-BR" sz="2400" b="0" i="1" u="none" strike="noStrike" kern="1200" cap="none" spc="0" normalizeH="0" baseline="0" noProof="0" smtClean="0">
-                          <a:ln>
-                            <a:noFill/>
-                          </a:ln>
-                          <a:solidFill>
-                            <a:srgbClr val="E03D3D"/>
-                          </a:solidFill>
-                          <a:effectLst/>
-                          <a:uLnTx/>
-                          <a:uFillTx/>
-                          <a:latin typeface="Cambria Math" panose="02040503050406030204" pitchFamily="18" charset="0"/>
-                          <a:ea typeface="+mn-ea"/>
-                          <a:cs typeface="+mn-cs"/>
-                        </a:rPr>
-                        <m:t>𝐷𝐸𝑆𝐶𝑂𝑁𝐻𝐸𝐶𝐼𝐷𝐴</m:t>
-                      </m:r>
-                    </m:oMath>
-                  </m:oMathPara>
-                </a14:m>
-                <a:endParaRPr kumimoji="0" lang="pt-BR" sz="2400" b="0" i="0" u="none" strike="noStrike" kern="1200" cap="none" spc="0" normalizeH="0" baseline="0" noProof="0" dirty="0">
-                  <a:ln>
-                    <a:noFill/>
-                  </a:ln>
-                  <a:solidFill>
-                    <a:srgbClr val="E03D3D"/>
-                  </a:solidFill>
-                  <a:effectLst/>
-                  <a:uLnTx/>
-                  <a:uFillTx/>
-                  <a:latin typeface="Arial"/>
-                  <a:ea typeface="+mn-ea"/>
-                  <a:cs typeface="+mn-cs"/>
-                </a:endParaRPr>
-              </a:p>
-            </p:txBody>
-          </p:sp>
-        </mc:Choice>
-        <mc:Fallback xmlns="">
-          <p:sp>
-            <p:nvSpPr>
-              <p:cNvPr id="4" name="Shape 6">
-                <a:extLst>
-                  <a:ext uri="{FF2B5EF4-FFF2-40B4-BE49-F238E27FC236}">
-                    <a16:creationId xmlns:a16="http://schemas.microsoft.com/office/drawing/2014/main" id="{19988A39-07FD-ECDD-B085-7D4C968F0B04}"/>
-                  </a:ext>
-                </a:extLst>
-              </p:cNvPr>
-              <p:cNvSpPr>
-                <a:spLocks noRot="1" noChangeAspect="1" noMove="1" noResize="1" noEditPoints="1" noAdjustHandles="1" noChangeArrowheads="1" noChangeShapeType="1" noTextEdit="1"/>
-              </p:cNvSpPr>
-              <p:nvPr/>
-            </p:nvSpPr>
-            <p:spPr>
-              <a:xfrm>
-                <a:off x="570451" y="3957686"/>
-                <a:ext cx="10592023" cy="498136"/>
-              </a:xfrm>
-              <a:prstGeom prst="roundRect">
-                <a:avLst>
-                  <a:gd name="adj" fmla="val 9412"/>
-                </a:avLst>
-              </a:prstGeom>
-              <a:blipFill>
-                <a:blip r:embed="rId5"/>
-                <a:stretch>
-                  <a:fillRect/>
-                </a:stretch>
-              </a:blipFill>
-              <a:ln w="15240">
-                <a:solidFill>
-                  <a:srgbClr val="4DA3FF"/>
-                </a:solidFill>
-                <a:round/>
-              </a:ln>
-            </p:spPr>
-            <p:txBody>
-              <a:bodyPr/>
-              <a:lstStyle/>
-              <a:p>
-                <a:r>
-                  <a:rPr lang="pt-BR">
-                    <a:noFill/>
-                  </a:rPr>
-                  <a:t> </a:t>
-                </a:r>
-              </a:p>
-            </p:txBody>
-          </p:sp>
-        </mc:Fallback>
-      </mc:AlternateContent>
+      <p:pic>
+        <p:nvPicPr>
+          <p:cNvPr id="3" name="Imagem 2">
+            <a:extLst>
+              <a:ext uri="{FF2B5EF4-FFF2-40B4-BE49-F238E27FC236}">
+                <a16:creationId xmlns:a16="http://schemas.microsoft.com/office/drawing/2014/main" id="{23B83D8B-3329-7778-5641-78F5B683AABF}"/>
+              </a:ext>
+            </a:extLst>
+          </p:cNvPr>
+          <p:cNvPicPr>
+            <a:picLocks noChangeAspect="1"/>
+          </p:cNvPicPr>
+          <p:nvPr/>
+        </p:nvPicPr>
+        <p:blipFill>
+          <a:blip r:embed="rId4"/>
+          <a:stretch>
+            <a:fillRect/>
+          </a:stretch>
+        </p:blipFill>
+        <p:spPr>
+          <a:xfrm>
+            <a:off x="3962697" y="1650179"/>
+            <a:ext cx="4716676" cy="3792935"/>
+          </a:xfrm>
+          <a:prstGeom prst="rect">
+            <a:avLst/>
+          </a:prstGeom>
+        </p:spPr>
+      </p:pic>
     </p:spTree>
   </p:cSld>
   <p:clrMapOvr>
@@ -15127,8 +14470,8 @@
           </a:p>
         </p:txBody>
       </p:sp>
-      <mc:AlternateContent xmlns:mc="http://schemas.openxmlformats.org/markup-compatibility/2006">
-        <mc:Choice xmlns:a14="http://schemas.microsoft.com/office/drawing/2010/main" Requires="a14">
+      <mc:AlternateContent xmlns:mc="http://schemas.openxmlformats.org/markup-compatibility/2006" xmlns:a14="http://schemas.microsoft.com/office/drawing/2010/main">
+        <mc:Choice Requires="a14">
           <p:sp>
             <p:nvSpPr>
               <p:cNvPr id="9" name="CaixaDeTexto 8">
@@ -15157,12 +14500,10 @@
               </a:bodyPr>
               <a:lstStyle/>
               <a:p>
+                <a:pPr/>
                 <a14:m>
                   <m:oMathPara xmlns:m="http://schemas.openxmlformats.org/officeDocument/2006/math">
-                    <m:oMathParaPr>
-                      <m:jc m:val="centerGroup"/>
-                    </m:oMathParaPr>
-                    <m:oMath xmlns:m="http://schemas.openxmlformats.org/officeDocument/2006/math">
+                    <m:oMath>
                       <m:r>
                         <m:rPr>
                           <m:nor/>
@@ -15170,25 +14511,7 @@
                         <a:rPr lang="pt-BR" i="0" smtClean="0">
                           <a:latin typeface="Cambria Math" panose="02040503050406030204" pitchFamily="18" charset="0"/>
                         </a:rPr>
-                        <m:t>Valor</m:t>
-                      </m:r>
-                      <m:r>
-                        <m:rPr>
-                          <m:nor/>
-                        </m:rPr>
-                        <a:rPr lang="pt-BR" i="0" smtClean="0">
-                          <a:latin typeface="Cambria Math" panose="02040503050406030204" pitchFamily="18" charset="0"/>
-                        </a:rPr>
-                        <m:t> </m:t>
-                      </m:r>
-                      <m:r>
-                        <m:rPr>
-                          <m:nor/>
-                        </m:rPr>
-                        <a:rPr lang="pt-BR" i="0" smtClean="0">
-                          <a:latin typeface="Cambria Math" panose="02040503050406030204" pitchFamily="18" charset="0"/>
-                        </a:rPr>
-                        <m:t>Gini</m:t>
+                        <m:t>Valor Gini</m:t>
                       </m:r>
                       <m:r>
                         <a:rPr lang="pt-BR" i="1">
@@ -15253,7 +14576,7 @@
             </p:txBody>
           </p:sp>
         </mc:Choice>
-        <mc:Fallback>
+        <mc:Fallback xmlns="">
           <p:sp>
             <p:nvSpPr>
               <p:cNvPr id="9" name="CaixaDeTexto 8">
@@ -15333,8 +14656,8 @@
           </a:p>
         </p:txBody>
       </p:sp>
-      <mc:AlternateContent xmlns:mc="http://schemas.openxmlformats.org/markup-compatibility/2006">
-        <mc:Choice xmlns:a14="http://schemas.microsoft.com/office/drawing/2010/main" Requires="a14">
+      <mc:AlternateContent xmlns:mc="http://schemas.openxmlformats.org/markup-compatibility/2006" xmlns:a14="http://schemas.microsoft.com/office/drawing/2010/main">
+        <mc:Choice Requires="a14">
           <p:sp>
             <p:nvSpPr>
               <p:cNvPr id="14" name="CaixaDeTexto 13">
@@ -15363,12 +14686,10 @@
               </a:bodyPr>
               <a:lstStyle/>
               <a:p>
+                <a:pPr/>
                 <a14:m>
                   <m:oMathPara xmlns:m="http://schemas.openxmlformats.org/officeDocument/2006/math">
-                    <m:oMathParaPr>
-                      <m:jc m:val="centerGroup"/>
-                    </m:oMathParaPr>
-                    <m:oMath xmlns:m="http://schemas.openxmlformats.org/officeDocument/2006/math">
+                    <m:oMath>
                       <m:r>
                         <m:rPr>
                           <m:nor/>
@@ -15376,25 +14697,7 @@
                         <a:rPr lang="pt-BR" i="0" smtClean="0">
                           <a:latin typeface="Cambria Math" panose="02040503050406030204" pitchFamily="18" charset="0"/>
                         </a:rPr>
-                        <m:t>Valor</m:t>
-                      </m:r>
-                      <m:r>
-                        <m:rPr>
-                          <m:nor/>
-                        </m:rPr>
-                        <a:rPr lang="pt-BR" i="0" smtClean="0">
-                          <a:latin typeface="Cambria Math" panose="02040503050406030204" pitchFamily="18" charset="0"/>
-                        </a:rPr>
-                        <m:t> </m:t>
-                      </m:r>
-                      <m:r>
-                        <m:rPr>
-                          <m:nor/>
-                        </m:rPr>
-                        <a:rPr lang="pt-BR" i="0" smtClean="0">
-                          <a:latin typeface="Cambria Math" panose="02040503050406030204" pitchFamily="18" charset="0"/>
-                        </a:rPr>
-                        <m:t>Gini</m:t>
+                        <m:t>Valor Gini</m:t>
                       </m:r>
                       <m:r>
                         <a:rPr lang="pt-BR" i="1">
@@ -15447,16 +14750,7 @@
                                 <a:rPr lang="pt-BR" i="0">
                                   <a:latin typeface="Cambria Math" panose="02040503050406030204" pitchFamily="18" charset="0"/>
                                 </a:rPr>
-                                <m:t>  </m:t>
-                              </m:r>
-                              <m:r>
-                                <m:rPr>
-                                  <m:nor/>
-                                </m:rPr>
-                                <a:rPr lang="pt-BR" i="0">
-                                  <a:latin typeface="Cambria Math" panose="02040503050406030204" pitchFamily="18" charset="0"/>
-                                </a:rPr>
-                                <m:t>casado</m:t>
+                                <m:t>  casado</m:t>
                               </m:r>
                             </m:sub>
                             <m:sup>
@@ -15498,52 +14792,7 @@
                                 <a:rPr lang="pt-BR" i="0">
                                   <a:latin typeface="Cambria Math" panose="02040503050406030204" pitchFamily="18" charset="0"/>
                                 </a:rPr>
-                                <m:t>  </m:t>
-                              </m:r>
-                              <m:r>
-                                <m:rPr>
-                                  <m:nor/>
-                                </m:rPr>
-                                <a:rPr lang="pt-BR" i="0">
-                                  <a:latin typeface="Cambria Math" panose="02040503050406030204" pitchFamily="18" charset="0"/>
-                                </a:rPr>
-                                <m:t>n</m:t>
-                              </m:r>
-                              <m:r>
-                                <m:rPr>
-                                  <m:nor/>
-                                </m:rPr>
-                                <a:rPr lang="pt-BR" i="0">
-                                  <a:latin typeface="Cambria Math" panose="02040503050406030204" pitchFamily="18" charset="0"/>
-                                </a:rPr>
-                                <m:t>ã</m:t>
-                              </m:r>
-                              <m:r>
-                                <m:rPr>
-                                  <m:nor/>
-                                </m:rPr>
-                                <a:rPr lang="pt-BR" i="0">
-                                  <a:latin typeface="Cambria Math" panose="02040503050406030204" pitchFamily="18" charset="0"/>
-                                </a:rPr>
-                                <m:t>o</m:t>
-                              </m:r>
-                              <m:r>
-                                <m:rPr>
-                                  <m:nor/>
-                                </m:rPr>
-                                <a:rPr lang="pt-BR" i="0">
-                                  <a:latin typeface="Cambria Math" panose="02040503050406030204" pitchFamily="18" charset="0"/>
-                                </a:rPr>
-                                <m:t> </m:t>
-                              </m:r>
-                              <m:r>
-                                <m:rPr>
-                                  <m:nor/>
-                                </m:rPr>
-                                <a:rPr lang="pt-BR" i="0">
-                                  <a:latin typeface="Cambria Math" panose="02040503050406030204" pitchFamily="18" charset="0"/>
-                                </a:rPr>
-                                <m:t>casado</m:t>
+                                <m:t>  não casado</m:t>
                               </m:r>
                             </m:sub>
                             <m:sup>
@@ -15571,7 +14820,7 @@
             </p:txBody>
           </p:sp>
         </mc:Choice>
-        <mc:Fallback>
+        <mc:Fallback xmlns="">
           <p:sp>
             <p:nvSpPr>
               <p:cNvPr id="14" name="CaixaDeTexto 13">
@@ -18817,8 +18066,8 @@
           </a:p>
         </p:txBody>
       </p:sp>
-      <mc:AlternateContent xmlns:mc="http://schemas.openxmlformats.org/markup-compatibility/2006">
-        <mc:Choice xmlns:a14="http://schemas.microsoft.com/office/drawing/2010/main" Requires="a14">
+      <mc:AlternateContent xmlns:mc="http://schemas.openxmlformats.org/markup-compatibility/2006" xmlns:a14="http://schemas.microsoft.com/office/drawing/2010/main">
+        <mc:Choice Requires="a14">
           <p:sp>
             <p:nvSpPr>
               <p:cNvPr id="38" name="CaixaDeTexto 37">
@@ -18847,12 +18096,10 @@
               </a:bodyPr>
               <a:lstStyle/>
               <a:p>
+                <a:pPr/>
                 <a14:m>
                   <m:oMathPara xmlns:m="http://schemas.openxmlformats.org/officeDocument/2006/math">
-                    <m:oMathParaPr>
-                      <m:jc m:val="centerGroup"/>
-                    </m:oMathParaPr>
-                    <m:oMath xmlns:m="http://schemas.openxmlformats.org/officeDocument/2006/math">
+                    <m:oMath>
                       <m:r>
                         <a:rPr lang="pt-BR" i="1" smtClean="0">
                           <a:latin typeface="Cambria Math" panose="02040503050406030204" pitchFamily="18" charset="0"/>
@@ -18862,7 +18109,7 @@
                       <m:d>
                         <m:dPr>
                           <m:ctrlPr>
-                            <a:rPr lang="pt-BR" i="1">
+                            <a:rPr lang="pt-BR" i="0">
                               <a:latin typeface="Cambria Math" panose="02040503050406030204" pitchFamily="18" charset="0"/>
                             </a:rPr>
                           </m:ctrlPr>
@@ -18924,7 +18171,7 @@
             </p:txBody>
           </p:sp>
         </mc:Choice>
-        <mc:Fallback>
+        <mc:Fallback xmlns="">
           <p:sp>
             <p:nvSpPr>
               <p:cNvPr id="38" name="CaixaDeTexto 37">
@@ -18969,8 +18216,8 @@
           </p:sp>
         </mc:Fallback>
       </mc:AlternateContent>
-      <mc:AlternateContent xmlns:mc="http://schemas.openxmlformats.org/markup-compatibility/2006">
-        <mc:Choice xmlns:a14="http://schemas.microsoft.com/office/drawing/2010/main" Requires="a14">
+      <mc:AlternateContent xmlns:mc="http://schemas.openxmlformats.org/markup-compatibility/2006" xmlns:a14="http://schemas.microsoft.com/office/drawing/2010/main">
+        <mc:Choice Requires="a14">
           <p:sp>
             <p:nvSpPr>
               <p:cNvPr id="39" name="CaixaDeTexto 38">
@@ -18999,12 +18246,10 @@
               </a:bodyPr>
               <a:lstStyle/>
               <a:p>
+                <a:pPr/>
                 <a14:m>
                   <m:oMathPara xmlns:m="http://schemas.openxmlformats.org/officeDocument/2006/math">
-                    <m:oMathParaPr>
-                      <m:jc m:val="centerGroup"/>
-                    </m:oMathParaPr>
-                    <m:oMath xmlns:m="http://schemas.openxmlformats.org/officeDocument/2006/math">
+                    <m:oMath>
                       <m:r>
                         <a:rPr lang="pt-BR" i="1" smtClean="0">
                           <a:latin typeface="Cambria Math" panose="02040503050406030204" pitchFamily="18" charset="0"/>
@@ -19014,7 +18259,7 @@
                       <m:d>
                         <m:dPr>
                           <m:ctrlPr>
-                            <a:rPr lang="pt-BR" i="1">
+                            <a:rPr lang="pt-BR" i="0">
                               <a:latin typeface="Cambria Math" panose="02040503050406030204" pitchFamily="18" charset="0"/>
                             </a:rPr>
                           </m:ctrlPr>
@@ -19027,43 +18272,7 @@
                             <a:rPr lang="pt-BR" i="0">
                               <a:latin typeface="Cambria Math" panose="02040503050406030204" pitchFamily="18" charset="0"/>
                             </a:rPr>
-                            <m:t>n</m:t>
-                          </m:r>
-                          <m:r>
-                            <m:rPr>
-                              <m:nor/>
-                            </m:rPr>
-                            <a:rPr lang="pt-BR" i="0">
-                              <a:latin typeface="Cambria Math" panose="02040503050406030204" pitchFamily="18" charset="0"/>
-                            </a:rPr>
-                            <m:t>ã</m:t>
-                          </m:r>
-                          <m:r>
-                            <m:rPr>
-                              <m:nor/>
-                            </m:rPr>
-                            <a:rPr lang="pt-BR" i="0">
-                              <a:latin typeface="Cambria Math" panose="02040503050406030204" pitchFamily="18" charset="0"/>
-                            </a:rPr>
-                            <m:t>o</m:t>
-                          </m:r>
-                          <m:r>
-                            <m:rPr>
-                              <m:nor/>
-                            </m:rPr>
-                            <a:rPr lang="pt-BR" i="0">
-                              <a:latin typeface="Cambria Math" panose="02040503050406030204" pitchFamily="18" charset="0"/>
-                            </a:rPr>
-                            <m:t> </m:t>
-                          </m:r>
-                          <m:r>
-                            <m:rPr>
-                              <m:nor/>
-                            </m:rPr>
-                            <a:rPr lang="pt-BR" i="0">
-                              <a:latin typeface="Cambria Math" panose="02040503050406030204" pitchFamily="18" charset="0"/>
-                            </a:rPr>
-                            <m:t>casado</m:t>
+                            <m:t>não casado</m:t>
                           </m:r>
                         </m:e>
                       </m:d>
@@ -19112,7 +18321,7 @@
             </p:txBody>
           </p:sp>
         </mc:Choice>
-        <mc:Fallback>
+        <mc:Fallback xmlns="">
           <p:sp>
             <p:nvSpPr>
               <p:cNvPr id="39" name="CaixaDeTexto 38">
@@ -19157,8 +18366,8 @@
           </p:sp>
         </mc:Fallback>
       </mc:AlternateContent>
-      <mc:AlternateContent xmlns:mc="http://schemas.openxmlformats.org/markup-compatibility/2006">
-        <mc:Choice xmlns:a14="http://schemas.microsoft.com/office/drawing/2010/main" Requires="a14">
+      <mc:AlternateContent xmlns:mc="http://schemas.openxmlformats.org/markup-compatibility/2006" xmlns:a14="http://schemas.microsoft.com/office/drawing/2010/main">
+        <mc:Choice Requires="a14">
           <p:sp>
             <p:nvSpPr>
               <p:cNvPr id="40" name="CaixaDeTexto 39">
@@ -19187,12 +18396,10 @@
               </a:bodyPr>
               <a:lstStyle/>
               <a:p>
+                <a:pPr/>
                 <a14:m>
                   <m:oMathPara xmlns:m="http://schemas.openxmlformats.org/officeDocument/2006/math">
-                    <m:oMathParaPr>
-                      <m:jc m:val="centerGroup"/>
-                    </m:oMathParaPr>
-                    <m:oMath xmlns:m="http://schemas.openxmlformats.org/officeDocument/2006/math">
+                    <m:oMath>
                       <m:r>
                         <a:rPr lang="pt-BR" i="1" smtClean="0">
                           <a:latin typeface="Cambria Math" panose="02040503050406030204" pitchFamily="18" charset="0"/>
@@ -19280,7 +18487,7 @@
             </p:txBody>
           </p:sp>
         </mc:Choice>
-        <mc:Fallback>
+        <mc:Fallback xmlns="">
           <p:sp>
             <p:nvSpPr>
               <p:cNvPr id="40" name="CaixaDeTexto 39">
@@ -19325,8 +18532,8 @@
           </p:sp>
         </mc:Fallback>
       </mc:AlternateContent>
-      <mc:AlternateContent xmlns:mc="http://schemas.openxmlformats.org/markup-compatibility/2006">
-        <mc:Choice xmlns:a14="http://schemas.microsoft.com/office/drawing/2010/main" Requires="a14">
+      <mc:AlternateContent xmlns:mc="http://schemas.openxmlformats.org/markup-compatibility/2006" xmlns:a14="http://schemas.microsoft.com/office/drawing/2010/main">
+        <mc:Choice Requires="a14">
           <p:sp>
             <p:nvSpPr>
               <p:cNvPr id="41" name="CaixaDeTexto 40">
@@ -19355,12 +18562,10 @@
               </a:bodyPr>
               <a:lstStyle/>
               <a:p>
+                <a:pPr/>
                 <a14:m>
                   <m:oMathPara xmlns:m="http://schemas.openxmlformats.org/officeDocument/2006/math">
-                    <m:oMathParaPr>
-                      <m:jc m:val="centerGroup"/>
-                    </m:oMathParaPr>
-                    <m:oMath xmlns:m="http://schemas.openxmlformats.org/officeDocument/2006/math">
+                    <m:oMath>
                       <m:r>
                         <a:rPr lang="pt-BR" i="1" smtClean="0">
                           <a:latin typeface="Cambria Math" panose="02040503050406030204" pitchFamily="18" charset="0"/>
@@ -19398,7 +18603,7 @@
             </p:txBody>
           </p:sp>
         </mc:Choice>
-        <mc:Fallback>
+        <mc:Fallback xmlns="">
           <p:sp>
             <p:nvSpPr>
               <p:cNvPr id="41" name="CaixaDeTexto 40">
@@ -19443,8 +18648,8 @@
           </p:sp>
         </mc:Fallback>
       </mc:AlternateContent>
-      <mc:AlternateContent xmlns:mc="http://schemas.openxmlformats.org/markup-compatibility/2006">
-        <mc:Choice xmlns:a14="http://schemas.microsoft.com/office/drawing/2010/main" Requires="a14">
+      <mc:AlternateContent xmlns:mc="http://schemas.openxmlformats.org/markup-compatibility/2006" xmlns:a14="http://schemas.microsoft.com/office/drawing/2010/main">
+        <mc:Choice Requires="a14">
           <p:sp>
             <p:nvSpPr>
               <p:cNvPr id="42" name="CaixaDeTexto 41">
@@ -19473,16 +18678,14 @@
               </a:bodyPr>
               <a:lstStyle/>
               <a:p>
+                <a:pPr/>
                 <a14:m>
                   <m:oMathPara xmlns:m="http://schemas.openxmlformats.org/officeDocument/2006/math">
-                    <m:oMathParaPr>
-                      <m:jc m:val="centerGroup"/>
-                    </m:oMathParaPr>
-                    <m:oMath xmlns:m="http://schemas.openxmlformats.org/officeDocument/2006/math">
+                    <m:oMath>
                       <m:borderBox>
                         <m:borderBoxPr>
                           <m:ctrlPr>
-                            <a:rPr lang="pt-BR" i="1" smtClean="0">
+                            <a:rPr lang="pt-BR" i="1">
                               <a:latin typeface="Cambria Math" panose="02040503050406030204" pitchFamily="18" charset="0"/>
                             </a:rPr>
                           </m:ctrlPr>
@@ -19510,7 +18713,7 @@
             </p:txBody>
           </p:sp>
         </mc:Choice>
-        <mc:Fallback>
+        <mc:Fallback xmlns="">
           <p:sp>
             <p:nvSpPr>
               <p:cNvPr id="42" name="CaixaDeTexto 41">
@@ -19649,8 +18852,8 @@
           </a:p>
         </p:txBody>
       </p:sp>
-      <mc:AlternateContent xmlns:mc="http://schemas.openxmlformats.org/markup-compatibility/2006">
-        <mc:Choice xmlns:a14="http://schemas.microsoft.com/office/drawing/2010/main" Requires="a14">
+      <mc:AlternateContent xmlns:mc="http://schemas.openxmlformats.org/markup-compatibility/2006" xmlns:a14="http://schemas.microsoft.com/office/drawing/2010/main">
+        <mc:Choice Requires="a14">
           <p:sp>
             <p:nvSpPr>
               <p:cNvPr id="46" name="CaixaDeTexto 45">
@@ -19679,12 +18882,10 @@
               </a:bodyPr>
               <a:lstStyle/>
               <a:p>
+                <a:pPr/>
                 <a14:m>
                   <m:oMathPara xmlns:m="http://schemas.openxmlformats.org/officeDocument/2006/math">
-                    <m:oMathParaPr>
-                      <m:jc m:val="centerGroup"/>
-                    </m:oMathParaPr>
-                    <m:oMath xmlns:m="http://schemas.openxmlformats.org/officeDocument/2006/math">
+                    <m:oMath>
                       <m:r>
                         <a:rPr lang="pt-BR" i="1" smtClean="0">
                           <a:latin typeface="Cambria Math" panose="02040503050406030204" pitchFamily="18" charset="0"/>
@@ -19694,7 +18895,7 @@
                       <m:d>
                         <m:dPr>
                           <m:ctrlPr>
-                            <a:rPr lang="pt-BR" i="1">
+                            <a:rPr lang="pt-BR" i="0">
                               <a:latin typeface="Cambria Math" panose="02040503050406030204" pitchFamily="18" charset="0"/>
                             </a:rPr>
                           </m:ctrlPr>
@@ -19720,7 +18921,7 @@
                       <m:f>
                         <m:fPr>
                           <m:ctrlPr>
-                            <a:rPr lang="pt-BR" i="1">
+                            <a:rPr lang="pt-BR" b="0" i="1" smtClean="0">
                               <a:latin typeface="Cambria Math" panose="02040503050406030204" pitchFamily="18" charset="0"/>
                             </a:rPr>
                           </m:ctrlPr>
@@ -19762,7 +18963,7 @@
             </p:txBody>
           </p:sp>
         </mc:Choice>
-        <mc:Fallback>
+        <mc:Fallback xmlns="">
           <p:sp>
             <p:nvSpPr>
               <p:cNvPr id="46" name="CaixaDeTexto 45">
@@ -19807,8 +19008,8 @@
           </p:sp>
         </mc:Fallback>
       </mc:AlternateContent>
-      <mc:AlternateContent xmlns:mc="http://schemas.openxmlformats.org/markup-compatibility/2006">
-        <mc:Choice xmlns:a14="http://schemas.microsoft.com/office/drawing/2010/main" Requires="a14">
+      <mc:AlternateContent xmlns:mc="http://schemas.openxmlformats.org/markup-compatibility/2006" xmlns:a14="http://schemas.microsoft.com/office/drawing/2010/main">
+        <mc:Choice Requires="a14">
           <p:sp>
             <p:nvSpPr>
               <p:cNvPr id="47" name="CaixaDeTexto 46">
@@ -19848,7 +19049,7 @@
                     <m:d>
                       <m:dPr>
                         <m:ctrlPr>
-                          <a:rPr lang="pt-BR" i="1">
+                          <a:rPr lang="pt-BR" i="0">
                             <a:latin typeface="Cambria Math" panose="02040503050406030204" pitchFamily="18" charset="0"/>
                           </a:rPr>
                         </m:ctrlPr>
@@ -19861,43 +19062,7 @@
                           <a:rPr lang="pt-BR" i="0">
                             <a:latin typeface="Cambria Math" panose="02040503050406030204" pitchFamily="18" charset="0"/>
                           </a:rPr>
-                          <m:t>n</m:t>
-                        </m:r>
-                        <m:r>
-                          <m:rPr>
-                            <m:nor/>
-                          </m:rPr>
-                          <a:rPr lang="pt-BR" i="0">
-                            <a:latin typeface="Cambria Math" panose="02040503050406030204" pitchFamily="18" charset="0"/>
-                          </a:rPr>
-                          <m:t>ã</m:t>
-                        </m:r>
-                        <m:r>
-                          <m:rPr>
-                            <m:nor/>
-                          </m:rPr>
-                          <a:rPr lang="pt-BR" i="0">
-                            <a:latin typeface="Cambria Math" panose="02040503050406030204" pitchFamily="18" charset="0"/>
-                          </a:rPr>
-                          <m:t>o</m:t>
-                        </m:r>
-                        <m:r>
-                          <m:rPr>
-                            <m:nor/>
-                          </m:rPr>
-                          <a:rPr lang="pt-BR" i="0">
-                            <a:latin typeface="Cambria Math" panose="02040503050406030204" pitchFamily="18" charset="0"/>
-                          </a:rPr>
-                          <m:t> </m:t>
-                        </m:r>
-                        <m:r>
-                          <m:rPr>
-                            <m:nor/>
-                          </m:rPr>
-                          <a:rPr lang="pt-BR" i="0">
-                            <a:latin typeface="Cambria Math" panose="02040503050406030204" pitchFamily="18" charset="0"/>
-                          </a:rPr>
-                          <m:t>casado</m:t>
+                          <m:t>não casado</m:t>
                         </m:r>
                       </m:e>
                     </m:d>
@@ -19910,7 +19075,7 @@
                     <m:f>
                       <m:fPr>
                         <m:ctrlPr>
-                          <a:rPr lang="pt-BR" i="1">
+                          <a:rPr lang="pt-BR" b="0" i="1" smtClean="0">
                             <a:latin typeface="Cambria Math" panose="02040503050406030204" pitchFamily="18" charset="0"/>
                           </a:rPr>
                         </m:ctrlPr>
@@ -19948,7 +19113,7 @@
             </p:txBody>
           </p:sp>
         </mc:Choice>
-        <mc:Fallback>
+        <mc:Fallback xmlns="">
           <p:sp>
             <p:nvSpPr>
               <p:cNvPr id="47" name="CaixaDeTexto 46">
@@ -19993,8 +19158,8 @@
           </p:sp>
         </mc:Fallback>
       </mc:AlternateContent>
-      <mc:AlternateContent xmlns:mc="http://schemas.openxmlformats.org/markup-compatibility/2006">
-        <mc:Choice xmlns:a14="http://schemas.microsoft.com/office/drawing/2010/main" Requires="a14">
+      <mc:AlternateContent xmlns:mc="http://schemas.openxmlformats.org/markup-compatibility/2006" xmlns:a14="http://schemas.microsoft.com/office/drawing/2010/main">
+        <mc:Choice Requires="a14">
           <p:sp>
             <p:nvSpPr>
               <p:cNvPr id="48" name="CaixaDeTexto 47">
@@ -20023,12 +19188,10 @@
               </a:bodyPr>
               <a:lstStyle/>
               <a:p>
+                <a:pPr/>
                 <a14:m>
                   <m:oMathPara xmlns:m="http://schemas.openxmlformats.org/officeDocument/2006/math">
-                    <m:oMathParaPr>
-                      <m:jc m:val="centerGroup"/>
-                    </m:oMathParaPr>
-                    <m:oMath xmlns:m="http://schemas.openxmlformats.org/officeDocument/2006/math">
+                    <m:oMath>
                       <m:r>
                         <a:rPr lang="pt-BR" i="1" smtClean="0">
                           <a:latin typeface="Cambria Math" panose="02040503050406030204" pitchFamily="18" charset="0"/>
@@ -20128,7 +19291,7 @@
             </p:txBody>
           </p:sp>
         </mc:Choice>
-        <mc:Fallback>
+        <mc:Fallback xmlns="">
           <p:sp>
             <p:nvSpPr>
               <p:cNvPr id="48" name="CaixaDeTexto 47">
@@ -20173,8 +19336,8 @@
           </p:sp>
         </mc:Fallback>
       </mc:AlternateContent>
-      <mc:AlternateContent xmlns:mc="http://schemas.openxmlformats.org/markup-compatibility/2006">
-        <mc:Choice xmlns:a14="http://schemas.microsoft.com/office/drawing/2010/main" Requires="a14">
+      <mc:AlternateContent xmlns:mc="http://schemas.openxmlformats.org/markup-compatibility/2006" xmlns:a14="http://schemas.microsoft.com/office/drawing/2010/main">
+        <mc:Choice Requires="a14">
           <p:sp>
             <p:nvSpPr>
               <p:cNvPr id="49" name="CaixaDeTexto 48">
@@ -20203,12 +19366,10 @@
               </a:bodyPr>
               <a:lstStyle/>
               <a:p>
+                <a:pPr/>
                 <a14:m>
                   <m:oMathPara xmlns:m="http://schemas.openxmlformats.org/officeDocument/2006/math">
-                    <m:oMathParaPr>
-                      <m:jc m:val="centerGroup"/>
-                    </m:oMathParaPr>
-                    <m:oMath xmlns:m="http://schemas.openxmlformats.org/officeDocument/2006/math">
+                    <m:oMath>
                       <m:r>
                         <a:rPr lang="pt-BR" i="1" smtClean="0">
                           <a:latin typeface="Cambria Math" panose="02040503050406030204" pitchFamily="18" charset="0"/>
@@ -20264,7 +19425,7 @@
             </p:txBody>
           </p:sp>
         </mc:Choice>
-        <mc:Fallback>
+        <mc:Fallback xmlns="">
           <p:sp>
             <p:nvSpPr>
               <p:cNvPr id="49" name="CaixaDeTexto 48">
@@ -20309,8 +19470,8 @@
           </p:sp>
         </mc:Fallback>
       </mc:AlternateContent>
-      <mc:AlternateContent xmlns:mc="http://schemas.openxmlformats.org/markup-compatibility/2006">
-        <mc:Choice xmlns:a14="http://schemas.microsoft.com/office/drawing/2010/main" Requires="a14">
+      <mc:AlternateContent xmlns:mc="http://schemas.openxmlformats.org/markup-compatibility/2006" xmlns:a14="http://schemas.microsoft.com/office/drawing/2010/main">
+        <mc:Choice Requires="a14">
           <p:sp>
             <p:nvSpPr>
               <p:cNvPr id="50" name="CaixaDeTexto 49">
@@ -20339,16 +19500,14 @@
               </a:bodyPr>
               <a:lstStyle/>
               <a:p>
+                <a:pPr/>
                 <a14:m>
                   <m:oMathPara xmlns:m="http://schemas.openxmlformats.org/officeDocument/2006/math">
-                    <m:oMathParaPr>
-                      <m:jc m:val="centerGroup"/>
-                    </m:oMathParaPr>
-                    <m:oMath xmlns:m="http://schemas.openxmlformats.org/officeDocument/2006/math">
+                    <m:oMath>
                       <m:borderBox>
                         <m:borderBoxPr>
                           <m:ctrlPr>
-                            <a:rPr lang="pt-BR" i="1" smtClean="0">
+                            <a:rPr lang="pt-BR" i="1">
                               <a:latin typeface="Cambria Math" panose="02040503050406030204" pitchFamily="18" charset="0"/>
                             </a:rPr>
                           </m:ctrlPr>
@@ -20376,7 +19535,7 @@
             </p:txBody>
           </p:sp>
         </mc:Choice>
-        <mc:Fallback>
+        <mc:Fallback xmlns="">
           <p:sp>
             <p:nvSpPr>
               <p:cNvPr id="50" name="CaixaDeTexto 49">
@@ -20930,8 +20089,8 @@
           </a:p>
         </p:txBody>
       </p:sp>
-      <mc:AlternateContent xmlns:mc="http://schemas.openxmlformats.org/markup-compatibility/2006">
-        <mc:Choice xmlns:a14="http://schemas.microsoft.com/office/drawing/2010/main" Requires="a14">
+      <mc:AlternateContent xmlns:mc="http://schemas.openxmlformats.org/markup-compatibility/2006" xmlns:a14="http://schemas.microsoft.com/office/drawing/2010/main">
+        <mc:Choice Requires="a14">
           <p:sp>
             <p:nvSpPr>
               <p:cNvPr id="38" name="CaixaDeTexto 37">
@@ -20963,10 +20122,7 @@
                 <a:pPr/>
                 <a14:m>
                   <m:oMathPara xmlns:m="http://schemas.openxmlformats.org/officeDocument/2006/math">
-                    <m:oMathParaPr>
-                      <m:jc m:val="centerGroup"/>
-                    </m:oMathParaPr>
-                    <m:oMath xmlns:m="http://schemas.openxmlformats.org/officeDocument/2006/math">
+                    <m:oMath>
                       <m:r>
                         <a:rPr lang="pt-BR" i="1" smtClean="0">
                           <a:latin typeface="Cambria Math" panose="02040503050406030204" pitchFamily="18" charset="0"/>
@@ -20976,7 +20132,7 @@
                       <m:d>
                         <m:dPr>
                           <m:ctrlPr>
-                            <a:rPr lang="pt-BR" i="1">
+                            <a:rPr lang="pt-BR" i="0">
                               <a:latin typeface="Cambria Math" panose="02040503050406030204" pitchFamily="18" charset="0"/>
                             </a:rPr>
                           </m:ctrlPr>
@@ -21002,7 +20158,7 @@
                       <m:f>
                         <m:fPr>
                           <m:ctrlPr>
-                            <a:rPr lang="pt-BR" i="1">
+                            <a:rPr lang="pt-BR" b="0" i="1" smtClean="0">
                               <a:latin typeface="Cambria Math" panose="02040503050406030204" pitchFamily="18" charset="0"/>
                             </a:rPr>
                           </m:ctrlPr>
@@ -21056,7 +20212,7 @@
             </p:txBody>
           </p:sp>
         </mc:Choice>
-        <mc:Fallback>
+        <mc:Fallback xmlns="">
           <p:sp>
             <p:nvSpPr>
               <p:cNvPr id="38" name="CaixaDeTexto 37">
@@ -21101,8 +20257,8 @@
           </p:sp>
         </mc:Fallback>
       </mc:AlternateContent>
-      <mc:AlternateContent xmlns:mc="http://schemas.openxmlformats.org/markup-compatibility/2006">
-        <mc:Choice xmlns:a14="http://schemas.microsoft.com/office/drawing/2010/main" Requires="a14">
+      <mc:AlternateContent xmlns:mc="http://schemas.openxmlformats.org/markup-compatibility/2006" xmlns:a14="http://schemas.microsoft.com/office/drawing/2010/main">
+        <mc:Choice Requires="a14">
           <p:sp>
             <p:nvSpPr>
               <p:cNvPr id="39" name="CaixaDeTexto 38">
@@ -21134,10 +20290,7 @@
                 <a:pPr/>
                 <a14:m>
                   <m:oMathPara xmlns:m="http://schemas.openxmlformats.org/officeDocument/2006/math">
-                    <m:oMathParaPr>
-                      <m:jc m:val="centerGroup"/>
-                    </m:oMathParaPr>
-                    <m:oMath xmlns:m="http://schemas.openxmlformats.org/officeDocument/2006/math">
+                    <m:oMath>
                       <m:r>
                         <a:rPr lang="pt-BR" i="1" smtClean="0">
                           <a:latin typeface="Cambria Math" panose="02040503050406030204" pitchFamily="18" charset="0"/>
@@ -21147,7 +20300,7 @@
                       <m:d>
                         <m:dPr>
                           <m:ctrlPr>
-                            <a:rPr lang="pt-BR" i="1">
+                            <a:rPr lang="pt-BR" i="0">
                               <a:latin typeface="Cambria Math" panose="02040503050406030204" pitchFamily="18" charset="0"/>
                             </a:rPr>
                           </m:ctrlPr>
@@ -21160,43 +20313,7 @@
                             <a:rPr lang="pt-BR" i="0">
                               <a:latin typeface="Cambria Math" panose="02040503050406030204" pitchFamily="18" charset="0"/>
                             </a:rPr>
-                            <m:t>n</m:t>
-                          </m:r>
-                          <m:r>
-                            <m:rPr>
-                              <m:nor/>
-                            </m:rPr>
-                            <a:rPr lang="pt-BR" i="0">
-                              <a:latin typeface="Cambria Math" panose="02040503050406030204" pitchFamily="18" charset="0"/>
-                            </a:rPr>
-                            <m:t>ã</m:t>
-                          </m:r>
-                          <m:r>
-                            <m:rPr>
-                              <m:nor/>
-                            </m:rPr>
-                            <a:rPr lang="pt-BR" i="0">
-                              <a:latin typeface="Cambria Math" panose="02040503050406030204" pitchFamily="18" charset="0"/>
-                            </a:rPr>
-                            <m:t>o</m:t>
-                          </m:r>
-                          <m:r>
-                            <m:rPr>
-                              <m:nor/>
-                            </m:rPr>
-                            <a:rPr lang="pt-BR" i="0">
-                              <a:latin typeface="Cambria Math" panose="02040503050406030204" pitchFamily="18" charset="0"/>
-                            </a:rPr>
-                            <m:t> </m:t>
-                          </m:r>
-                          <m:r>
-                            <m:rPr>
-                              <m:nor/>
-                            </m:rPr>
-                            <a:rPr lang="pt-BR" i="0">
-                              <a:latin typeface="Cambria Math" panose="02040503050406030204" pitchFamily="18" charset="0"/>
-                            </a:rPr>
-                            <m:t>casado</m:t>
+                            <m:t>não casado</m:t>
                           </m:r>
                         </m:e>
                       </m:d>
@@ -21209,7 +20326,7 @@
                       <m:f>
                         <m:fPr>
                           <m:ctrlPr>
-                            <a:rPr lang="pt-BR" i="1">
+                            <a:rPr lang="pt-BR" b="0" i="1" smtClean="0">
                               <a:latin typeface="Cambria Math" panose="02040503050406030204" pitchFamily="18" charset="0"/>
                             </a:rPr>
                           </m:ctrlPr>
@@ -21251,7 +20368,7 @@
             </p:txBody>
           </p:sp>
         </mc:Choice>
-        <mc:Fallback>
+        <mc:Fallback xmlns="">
           <p:sp>
             <p:nvSpPr>
               <p:cNvPr id="39" name="CaixaDeTexto 38">
@@ -21296,8 +20413,8 @@
           </p:sp>
         </mc:Fallback>
       </mc:AlternateContent>
-      <mc:AlternateContent xmlns:mc="http://schemas.openxmlformats.org/markup-compatibility/2006">
-        <mc:Choice xmlns:a14="http://schemas.microsoft.com/office/drawing/2010/main" Requires="a14">
+      <mc:AlternateContent xmlns:mc="http://schemas.openxmlformats.org/markup-compatibility/2006" xmlns:a14="http://schemas.microsoft.com/office/drawing/2010/main">
+        <mc:Choice Requires="a14">
           <p:sp>
             <p:nvSpPr>
               <p:cNvPr id="40" name="CaixaDeTexto 39">
@@ -21329,10 +20446,7 @@
                 <a:pPr/>
                 <a14:m>
                   <m:oMathPara xmlns:m="http://schemas.openxmlformats.org/officeDocument/2006/math">
-                    <m:oMathParaPr>
-                      <m:jc m:val="centerGroup"/>
-                    </m:oMathParaPr>
-                    <m:oMath xmlns:m="http://schemas.openxmlformats.org/officeDocument/2006/math">
+                    <m:oMath>
                       <m:r>
                         <a:rPr lang="pt-BR" i="1" smtClean="0">
                           <a:latin typeface="Cambria Math" panose="02040503050406030204" pitchFamily="18" charset="0"/>
@@ -21357,7 +20471,7 @@
                           <m:sSup>
                             <m:sSupPr>
                               <m:ctrlPr>
-                                <a:rPr lang="pt-BR" i="1">
+                                <a:rPr lang="pt-BR" b="0" i="1" smtClean="0">
                                   <a:latin typeface="Cambria Math" panose="02040503050406030204" pitchFamily="18" charset="0"/>
                                 </a:rPr>
                               </m:ctrlPr>
@@ -21400,7 +20514,7 @@
                           <m:sSup>
                             <m:sSupPr>
                               <m:ctrlPr>
-                                <a:rPr lang="pt-BR" i="1">
+                                <a:rPr lang="pt-BR" b="0" i="1" smtClean="0">
                                   <a:latin typeface="Cambria Math" panose="02040503050406030204" pitchFamily="18" charset="0"/>
                                 </a:rPr>
                               </m:ctrlPr>
@@ -21432,7 +20546,7 @@
             </p:txBody>
           </p:sp>
         </mc:Choice>
-        <mc:Fallback>
+        <mc:Fallback xmlns="">
           <p:sp>
             <p:nvSpPr>
               <p:cNvPr id="40" name="CaixaDeTexto 39">
@@ -21477,8 +20591,8 @@
           </p:sp>
         </mc:Fallback>
       </mc:AlternateContent>
-      <mc:AlternateContent xmlns:mc="http://schemas.openxmlformats.org/markup-compatibility/2006">
-        <mc:Choice xmlns:a14="http://schemas.microsoft.com/office/drawing/2010/main" Requires="a14">
+      <mc:AlternateContent xmlns:mc="http://schemas.openxmlformats.org/markup-compatibility/2006" xmlns:a14="http://schemas.microsoft.com/office/drawing/2010/main">
+        <mc:Choice Requires="a14">
           <p:sp>
             <p:nvSpPr>
               <p:cNvPr id="41" name="CaixaDeTexto 40">
@@ -21510,10 +20624,7 @@
                 <a:pPr/>
                 <a14:m>
                   <m:oMathPara xmlns:m="http://schemas.openxmlformats.org/officeDocument/2006/math">
-                    <m:oMathParaPr>
-                      <m:jc m:val="centerGroup"/>
-                    </m:oMathParaPr>
-                    <m:oMath xmlns:m="http://schemas.openxmlformats.org/officeDocument/2006/math">
+                    <m:oMath>
                       <m:r>
                         <a:rPr lang="pt-BR" i="1" smtClean="0">
                           <a:latin typeface="Cambria Math" panose="02040503050406030204" pitchFamily="18" charset="0"/>
@@ -21529,7 +20640,7 @@
                       <m:d>
                         <m:dPr>
                           <m:ctrlPr>
-                            <a:rPr lang="pt-BR" i="1">
+                            <a:rPr lang="pt-BR" b="0" i="1" smtClean="0">
                               <a:latin typeface="Cambria Math" panose="02040503050406030204" pitchFamily="18" charset="0"/>
                             </a:rPr>
                           </m:ctrlPr>
@@ -21563,7 +20674,7 @@
             </p:txBody>
           </p:sp>
         </mc:Choice>
-        <mc:Fallback>
+        <mc:Fallback xmlns="">
           <p:sp>
             <p:nvSpPr>
               <p:cNvPr id="41" name="CaixaDeTexto 40">
@@ -21608,8 +20719,8 @@
           </p:sp>
         </mc:Fallback>
       </mc:AlternateContent>
-      <mc:AlternateContent xmlns:mc="http://schemas.openxmlformats.org/markup-compatibility/2006">
-        <mc:Choice xmlns:a14="http://schemas.microsoft.com/office/drawing/2010/main" Requires="a14">
+      <mc:AlternateContent xmlns:mc="http://schemas.openxmlformats.org/markup-compatibility/2006" xmlns:a14="http://schemas.microsoft.com/office/drawing/2010/main">
+        <mc:Choice Requires="a14">
           <p:sp>
             <p:nvSpPr>
               <p:cNvPr id="42" name="CaixaDeTexto 41">
@@ -21641,14 +20752,11 @@
                 <a:pPr/>
                 <a14:m>
                   <m:oMathPara xmlns:m="http://schemas.openxmlformats.org/officeDocument/2006/math">
-                    <m:oMathParaPr>
-                      <m:jc m:val="centerGroup"/>
-                    </m:oMathParaPr>
-                    <m:oMath xmlns:m="http://schemas.openxmlformats.org/officeDocument/2006/math">
+                    <m:oMath>
                       <m:borderBox>
                         <m:borderBoxPr>
                           <m:ctrlPr>
-                            <a:rPr lang="pt-BR" i="1" smtClean="0">
+                            <a:rPr lang="pt-BR" i="1">
                               <a:latin typeface="Cambria Math" panose="02040503050406030204" pitchFamily="18" charset="0"/>
                             </a:rPr>
                           </m:ctrlPr>
@@ -21676,7 +20784,7 @@
             </p:txBody>
           </p:sp>
         </mc:Choice>
-        <mc:Fallback>
+        <mc:Fallback xmlns="">
           <p:sp>
             <p:nvSpPr>
               <p:cNvPr id="42" name="CaixaDeTexto 41">
@@ -21807,8 +20915,8 @@
           </a:p>
         </p:txBody>
       </p:sp>
-      <mc:AlternateContent xmlns:mc="http://schemas.openxmlformats.org/markup-compatibility/2006">
-        <mc:Choice xmlns:a14="http://schemas.microsoft.com/office/drawing/2010/main" Requires="a14">
+      <mc:AlternateContent xmlns:mc="http://schemas.openxmlformats.org/markup-compatibility/2006" xmlns:a14="http://schemas.microsoft.com/office/drawing/2010/main">
+        <mc:Choice Requires="a14">
           <p:sp>
             <p:nvSpPr>
               <p:cNvPr id="46" name="CaixaDeTexto 45">
@@ -21840,10 +20948,7 @@
                 <a:pPr/>
                 <a14:m>
                   <m:oMathPara xmlns:m="http://schemas.openxmlformats.org/officeDocument/2006/math">
-                    <m:oMathParaPr>
-                      <m:jc m:val="centerGroup"/>
-                    </m:oMathParaPr>
-                    <m:oMath xmlns:m="http://schemas.openxmlformats.org/officeDocument/2006/math">
+                    <m:oMath>
                       <m:r>
                         <a:rPr lang="pt-BR" i="1" smtClean="0">
                           <a:latin typeface="Cambria Math" panose="02040503050406030204" pitchFamily="18" charset="0"/>
@@ -21853,7 +20958,7 @@
                       <m:d>
                         <m:dPr>
                           <m:ctrlPr>
-                            <a:rPr lang="pt-BR" i="1">
+                            <a:rPr lang="pt-BR" i="0">
                               <a:latin typeface="Cambria Math" panose="02040503050406030204" pitchFamily="18" charset="0"/>
                             </a:rPr>
                           </m:ctrlPr>
@@ -21879,7 +20984,7 @@
                       <m:f>
                         <m:fPr>
                           <m:ctrlPr>
-                            <a:rPr lang="pt-BR" i="1">
+                            <a:rPr lang="pt-BR" b="0" i="1" smtClean="0">
                               <a:latin typeface="Cambria Math" panose="02040503050406030204" pitchFamily="18" charset="0"/>
                             </a:rPr>
                           </m:ctrlPr>
@@ -21915,7 +21020,7 @@
             </p:txBody>
           </p:sp>
         </mc:Choice>
-        <mc:Fallback>
+        <mc:Fallback xmlns="">
           <p:sp>
             <p:nvSpPr>
               <p:cNvPr id="46" name="CaixaDeTexto 45">
@@ -21960,8 +21065,8 @@
           </p:sp>
         </mc:Fallback>
       </mc:AlternateContent>
-      <mc:AlternateContent xmlns:mc="http://schemas.openxmlformats.org/markup-compatibility/2006">
-        <mc:Choice xmlns:a14="http://schemas.microsoft.com/office/drawing/2010/main" Requires="a14">
+      <mc:AlternateContent xmlns:mc="http://schemas.openxmlformats.org/markup-compatibility/2006" xmlns:a14="http://schemas.microsoft.com/office/drawing/2010/main">
+        <mc:Choice Requires="a14">
           <p:sp>
             <p:nvSpPr>
               <p:cNvPr id="47" name="CaixaDeTexto 46">
@@ -21990,12 +21095,10 @@
               </a:bodyPr>
               <a:lstStyle/>
               <a:p>
+                <a:pPr/>
                 <a14:m>
                   <m:oMathPara xmlns:m="http://schemas.openxmlformats.org/officeDocument/2006/math">
-                    <m:oMathParaPr>
-                      <m:jc m:val="centerGroup"/>
-                    </m:oMathParaPr>
-                    <m:oMath xmlns:m="http://schemas.openxmlformats.org/officeDocument/2006/math">
+                    <m:oMath>
                       <m:r>
                         <a:rPr lang="pt-BR" i="1" smtClean="0">
                           <a:latin typeface="Cambria Math" panose="02040503050406030204" pitchFamily="18" charset="0"/>
@@ -22005,7 +21108,7 @@
                       <m:d>
                         <m:dPr>
                           <m:ctrlPr>
-                            <a:rPr lang="pt-BR" i="1">
+                            <a:rPr lang="pt-BR" i="0">
                               <a:latin typeface="Cambria Math" panose="02040503050406030204" pitchFamily="18" charset="0"/>
                             </a:rPr>
                           </m:ctrlPr>
@@ -22018,43 +21121,7 @@
                             <a:rPr lang="pt-BR" i="0">
                               <a:latin typeface="Cambria Math" panose="02040503050406030204" pitchFamily="18" charset="0"/>
                             </a:rPr>
-                            <m:t>n</m:t>
-                          </m:r>
-                          <m:r>
-                            <m:rPr>
-                              <m:nor/>
-                            </m:rPr>
-                            <a:rPr lang="pt-BR" i="0">
-                              <a:latin typeface="Cambria Math" panose="02040503050406030204" pitchFamily="18" charset="0"/>
-                            </a:rPr>
-                            <m:t>ã</m:t>
-                          </m:r>
-                          <m:r>
-                            <m:rPr>
-                              <m:nor/>
-                            </m:rPr>
-                            <a:rPr lang="pt-BR" i="0">
-                              <a:latin typeface="Cambria Math" panose="02040503050406030204" pitchFamily="18" charset="0"/>
-                            </a:rPr>
-                            <m:t>o</m:t>
-                          </m:r>
-                          <m:r>
-                            <m:rPr>
-                              <m:nor/>
-                            </m:rPr>
-                            <a:rPr lang="pt-BR" i="0">
-                              <a:latin typeface="Cambria Math" panose="02040503050406030204" pitchFamily="18" charset="0"/>
-                            </a:rPr>
-                            <m:t> </m:t>
-                          </m:r>
-                          <m:r>
-                            <m:rPr>
-                              <m:nor/>
-                            </m:rPr>
-                            <a:rPr lang="pt-BR" i="0">
-                              <a:latin typeface="Cambria Math" panose="02040503050406030204" pitchFamily="18" charset="0"/>
-                            </a:rPr>
-                            <m:t>casado</m:t>
+                            <m:t>não casado</m:t>
                           </m:r>
                         </m:e>
                       </m:d>
@@ -22067,7 +21134,7 @@
                       <m:f>
                         <m:fPr>
                           <m:ctrlPr>
-                            <a:rPr lang="pt-BR" i="1">
+                            <a:rPr lang="pt-BR" b="0" i="1" smtClean="0">
                               <a:latin typeface="Cambria Math" panose="02040503050406030204" pitchFamily="18" charset="0"/>
                             </a:rPr>
                           </m:ctrlPr>
@@ -22121,7 +21188,7 @@
             </p:txBody>
           </p:sp>
         </mc:Choice>
-        <mc:Fallback>
+        <mc:Fallback xmlns="">
           <p:sp>
             <p:nvSpPr>
               <p:cNvPr id="47" name="CaixaDeTexto 46">
@@ -22166,8 +21233,8 @@
           </p:sp>
         </mc:Fallback>
       </mc:AlternateContent>
-      <mc:AlternateContent xmlns:mc="http://schemas.openxmlformats.org/markup-compatibility/2006">
-        <mc:Choice xmlns:a14="http://schemas.microsoft.com/office/drawing/2010/main" Requires="a14">
+      <mc:AlternateContent xmlns:mc="http://schemas.openxmlformats.org/markup-compatibility/2006" xmlns:a14="http://schemas.microsoft.com/office/drawing/2010/main">
+        <mc:Choice Requires="a14">
           <p:sp>
             <p:nvSpPr>
               <p:cNvPr id="48" name="CaixaDeTexto 47">
@@ -22199,10 +21266,7 @@
                 <a:pPr/>
                 <a14:m>
                   <m:oMathPara xmlns:m="http://schemas.openxmlformats.org/officeDocument/2006/math">
-                    <m:oMathParaPr>
-                      <m:jc m:val="centerGroup"/>
-                    </m:oMathParaPr>
-                    <m:oMath xmlns:m="http://schemas.openxmlformats.org/officeDocument/2006/math">
+                    <m:oMath>
                       <m:r>
                         <a:rPr lang="pt-BR" i="1" smtClean="0">
                           <a:latin typeface="Cambria Math" panose="02040503050406030204" pitchFamily="18" charset="0"/>
@@ -22264,7 +21328,7 @@
                           <m:sSup>
                             <m:sSupPr>
                               <m:ctrlPr>
-                                <a:rPr lang="pt-BR" i="1">
+                                <a:rPr lang="pt-BR" b="0" i="1" smtClean="0">
                                   <a:latin typeface="Cambria Math" panose="02040503050406030204" pitchFamily="18" charset="0"/>
                                 </a:rPr>
                               </m:ctrlPr>
@@ -22308,7 +21372,7 @@
             </p:txBody>
           </p:sp>
         </mc:Choice>
-        <mc:Fallback>
+        <mc:Fallback xmlns="">
           <p:sp>
             <p:nvSpPr>
               <p:cNvPr id="48" name="CaixaDeTexto 47">
@@ -22353,8 +21417,8 @@
           </p:sp>
         </mc:Fallback>
       </mc:AlternateContent>
-      <mc:AlternateContent xmlns:mc="http://schemas.openxmlformats.org/markup-compatibility/2006">
-        <mc:Choice xmlns:a14="http://schemas.microsoft.com/office/drawing/2010/main" Requires="a14">
+      <mc:AlternateContent xmlns:mc="http://schemas.openxmlformats.org/markup-compatibility/2006" xmlns:a14="http://schemas.microsoft.com/office/drawing/2010/main">
+        <mc:Choice Requires="a14">
           <p:sp>
             <p:nvSpPr>
               <p:cNvPr id="49" name="CaixaDeTexto 48">
@@ -22386,10 +21450,7 @@
                 <a:pPr/>
                 <a14:m>
                   <m:oMathPara xmlns:m="http://schemas.openxmlformats.org/officeDocument/2006/math">
-                    <m:oMathParaPr>
-                      <m:jc m:val="centerGroup"/>
-                    </m:oMathParaPr>
-                    <m:oMath xmlns:m="http://schemas.openxmlformats.org/officeDocument/2006/math">
+                    <m:oMath>
                       <m:r>
                         <a:rPr lang="pt-BR" i="1" smtClean="0">
                           <a:latin typeface="Cambria Math" panose="02040503050406030204" pitchFamily="18" charset="0"/>
@@ -22405,7 +21466,7 @@
                       <m:d>
                         <m:dPr>
                           <m:ctrlPr>
-                            <a:rPr lang="pt-BR" i="1">
+                            <a:rPr lang="pt-BR" b="0" i="1" smtClean="0">
                               <a:latin typeface="Cambria Math" panose="02040503050406030204" pitchFamily="18" charset="0"/>
                             </a:rPr>
                           </m:ctrlPr>
@@ -22439,7 +21500,7 @@
             </p:txBody>
           </p:sp>
         </mc:Choice>
-        <mc:Fallback>
+        <mc:Fallback xmlns="">
           <p:sp>
             <p:nvSpPr>
               <p:cNvPr id="49" name="CaixaDeTexto 48">
@@ -22484,8 +21545,8 @@
           </p:sp>
         </mc:Fallback>
       </mc:AlternateContent>
-      <mc:AlternateContent xmlns:mc="http://schemas.openxmlformats.org/markup-compatibility/2006">
-        <mc:Choice xmlns:a14="http://schemas.microsoft.com/office/drawing/2010/main" Requires="a14">
+      <mc:AlternateContent xmlns:mc="http://schemas.openxmlformats.org/markup-compatibility/2006" xmlns:a14="http://schemas.microsoft.com/office/drawing/2010/main">
+        <mc:Choice Requires="a14">
           <p:sp>
             <p:nvSpPr>
               <p:cNvPr id="50" name="CaixaDeTexto 49">
@@ -22517,14 +21578,11 @@
                 <a:pPr/>
                 <a14:m>
                   <m:oMathPara xmlns:m="http://schemas.openxmlformats.org/officeDocument/2006/math">
-                    <m:oMathParaPr>
-                      <m:jc m:val="centerGroup"/>
-                    </m:oMathParaPr>
-                    <m:oMath xmlns:m="http://schemas.openxmlformats.org/officeDocument/2006/math">
+                    <m:oMath>
                       <m:borderBox>
                         <m:borderBoxPr>
                           <m:ctrlPr>
-                            <a:rPr lang="pt-BR" i="1" smtClean="0">
+                            <a:rPr lang="pt-BR" i="1">
                               <a:latin typeface="Cambria Math" panose="02040503050406030204" pitchFamily="18" charset="0"/>
                             </a:rPr>
                           </m:ctrlPr>
@@ -22552,7 +21610,7 @@
             </p:txBody>
           </p:sp>
         </mc:Choice>
-        <mc:Fallback>
+        <mc:Fallback xmlns="">
           <p:sp>
             <p:nvSpPr>
               <p:cNvPr id="50" name="CaixaDeTexto 49">
@@ -23037,8 +22095,8 @@
           </a:p>
         </p:txBody>
       </p:sp>
-      <mc:AlternateContent xmlns:mc="http://schemas.openxmlformats.org/markup-compatibility/2006">
-        <mc:Choice xmlns:a14="http://schemas.microsoft.com/office/drawing/2010/main" Requires="a14">
+      <mc:AlternateContent xmlns:mc="http://schemas.openxmlformats.org/markup-compatibility/2006" xmlns:a14="http://schemas.microsoft.com/office/drawing/2010/main">
+        <mc:Choice Requires="a14">
           <p:sp>
             <p:nvSpPr>
               <p:cNvPr id="9" name="CaixaDeTexto 8">
@@ -23070,10 +22128,7 @@
                 <a:pPr/>
                 <a14:m>
                   <m:oMathPara xmlns:m="http://schemas.openxmlformats.org/officeDocument/2006/math">
-                    <m:oMathParaPr>
-                      <m:jc m:val="centerGroup"/>
-                    </m:oMathParaPr>
-                    <m:oMath xmlns:m="http://schemas.openxmlformats.org/officeDocument/2006/math">
+                    <m:oMath>
                       <m:r>
                         <a:rPr lang="pt-BR" i="1" smtClean="0">
                           <a:latin typeface="Cambria Math" panose="02040503050406030204" pitchFamily="18" charset="0"/>
@@ -23089,7 +22144,7 @@
                       <m:d>
                         <m:dPr>
                           <m:ctrlPr>
-                            <a:rPr lang="pt-BR" i="1">
+                            <a:rPr lang="pt-BR" b="0" i="1" smtClean="0">
                               <a:latin typeface="Cambria Math" panose="02040503050406030204" pitchFamily="18" charset="0"/>
                             </a:rPr>
                           </m:ctrlPr>
@@ -23111,7 +22166,7 @@
             </p:txBody>
           </p:sp>
         </mc:Choice>
-        <mc:Fallback>
+        <mc:Fallback xmlns="">
           <p:sp>
             <p:nvSpPr>
               <p:cNvPr id="9" name="CaixaDeTexto 8">
@@ -23156,8 +22211,8 @@
           </p:sp>
         </mc:Fallback>
       </mc:AlternateContent>
-      <mc:AlternateContent xmlns:mc="http://schemas.openxmlformats.org/markup-compatibility/2006">
-        <mc:Choice xmlns:a14="http://schemas.microsoft.com/office/drawing/2010/main" Requires="a14">
+      <mc:AlternateContent xmlns:mc="http://schemas.openxmlformats.org/markup-compatibility/2006" xmlns:a14="http://schemas.microsoft.com/office/drawing/2010/main">
+        <mc:Choice Requires="a14">
           <p:sp>
             <p:nvSpPr>
               <p:cNvPr id="10" name="CaixaDeTexto 9">
@@ -23189,10 +22244,7 @@
                 <a:pPr/>
                 <a14:m>
                   <m:oMathPara xmlns:m="http://schemas.openxmlformats.org/officeDocument/2006/math">
-                    <m:oMathParaPr>
-                      <m:jc m:val="centerGroup"/>
-                    </m:oMathParaPr>
-                    <m:oMath xmlns:m="http://schemas.openxmlformats.org/officeDocument/2006/math">
+                    <m:oMath>
                       <m:r>
                         <a:rPr lang="pt-BR" i="1" smtClean="0">
                           <a:latin typeface="Cambria Math" panose="02040503050406030204" pitchFamily="18" charset="0"/>
@@ -23208,7 +22260,7 @@
                       <m:d>
                         <m:dPr>
                           <m:ctrlPr>
-                            <a:rPr lang="pt-BR" i="1">
+                            <a:rPr lang="pt-BR" b="0" i="1" smtClean="0">
                               <a:latin typeface="Cambria Math" panose="02040503050406030204" pitchFamily="18" charset="0"/>
                             </a:rPr>
                           </m:ctrlPr>
@@ -23230,7 +22282,7 @@
             </p:txBody>
           </p:sp>
         </mc:Choice>
-        <mc:Fallback>
+        <mc:Fallback xmlns="">
           <p:sp>
             <p:nvSpPr>
               <p:cNvPr id="10" name="CaixaDeTexto 9">
@@ -25514,8 +24566,8 @@
           </a:p>
         </p:txBody>
       </p:sp>
-      <mc:AlternateContent xmlns:mc="http://schemas.openxmlformats.org/markup-compatibility/2006">
-        <mc:Choice xmlns:a14="http://schemas.microsoft.com/office/drawing/2010/main" Requires="a14">
+      <mc:AlternateContent xmlns:mc="http://schemas.openxmlformats.org/markup-compatibility/2006" xmlns:a14="http://schemas.microsoft.com/office/drawing/2010/main">
+        <mc:Choice Requires="a14">
           <p:sp>
             <p:nvSpPr>
               <p:cNvPr id="14" name="CaixaDeTexto 13">
@@ -25547,10 +24599,7 @@
                 <a:pPr/>
                 <a14:m>
                   <m:oMathPara xmlns:m="http://schemas.openxmlformats.org/officeDocument/2006/math">
-                    <m:oMathParaPr>
-                      <m:jc m:val="centerGroup"/>
-                    </m:oMathParaPr>
-                    <m:oMath xmlns:m="http://schemas.openxmlformats.org/officeDocument/2006/math">
+                    <m:oMath>
                       <m:r>
                         <m:rPr>
                           <m:nor/>
@@ -25558,25 +24607,7 @@
                         <a:rPr lang="pt-BR" i="0" smtClean="0">
                           <a:latin typeface="Cambria Math" panose="02040503050406030204" pitchFamily="18" charset="0"/>
                         </a:rPr>
-                        <m:t>Valor</m:t>
-                      </m:r>
-                      <m:r>
-                        <m:rPr>
-                          <m:nor/>
-                        </m:rPr>
-                        <a:rPr lang="pt-BR" i="0" smtClean="0">
-                          <a:latin typeface="Cambria Math" panose="02040503050406030204" pitchFamily="18" charset="0"/>
-                        </a:rPr>
-                        <m:t> </m:t>
-                      </m:r>
-                      <m:r>
-                        <m:rPr>
-                          <m:nor/>
-                        </m:rPr>
-                        <a:rPr lang="pt-BR" i="0" smtClean="0">
-                          <a:latin typeface="Cambria Math" panose="02040503050406030204" pitchFamily="18" charset="0"/>
-                        </a:rPr>
-                        <m:t>Gini</m:t>
+                        <m:t>Valor Gini</m:t>
                       </m:r>
                       <m:r>
                         <a:rPr lang="pt-BR" i="1">
@@ -25629,16 +24660,7 @@
                                 <a:rPr lang="pt-BR" i="0">
                                   <a:latin typeface="Cambria Math" panose="02040503050406030204" pitchFamily="18" charset="0"/>
                                 </a:rPr>
-                                <m:t>  </m:t>
-                              </m:r>
-                              <m:r>
-                                <m:rPr>
-                                  <m:nor/>
-                                </m:rPr>
-                                <a:rPr lang="pt-BR" i="0">
-                                  <a:latin typeface="Cambria Math" panose="02040503050406030204" pitchFamily="18" charset="0"/>
-                                </a:rPr>
-                                <m:t>casado</m:t>
+                                <m:t>  casado</m:t>
                               </m:r>
                             </m:sub>
                             <m:sup>
@@ -25680,52 +24702,7 @@
                                 <a:rPr lang="pt-BR" i="0">
                                   <a:latin typeface="Cambria Math" panose="02040503050406030204" pitchFamily="18" charset="0"/>
                                 </a:rPr>
-                                <m:t>  </m:t>
-                              </m:r>
-                              <m:r>
-                                <m:rPr>
-                                  <m:nor/>
-                                </m:rPr>
-                                <a:rPr lang="pt-BR" i="0">
-                                  <a:latin typeface="Cambria Math" panose="02040503050406030204" pitchFamily="18" charset="0"/>
-                                </a:rPr>
-                                <m:t>n</m:t>
-                              </m:r>
-                              <m:r>
-                                <m:rPr>
-                                  <m:nor/>
-                                </m:rPr>
-                                <a:rPr lang="pt-BR" i="0">
-                                  <a:latin typeface="Cambria Math" panose="02040503050406030204" pitchFamily="18" charset="0"/>
-                                </a:rPr>
-                                <m:t>ã</m:t>
-                              </m:r>
-                              <m:r>
-                                <m:rPr>
-                                  <m:nor/>
-                                </m:rPr>
-                                <a:rPr lang="pt-BR" i="0">
-                                  <a:latin typeface="Cambria Math" panose="02040503050406030204" pitchFamily="18" charset="0"/>
-                                </a:rPr>
-                                <m:t>o</m:t>
-                              </m:r>
-                              <m:r>
-                                <m:rPr>
-                                  <m:nor/>
-                                </m:rPr>
-                                <a:rPr lang="pt-BR" i="0">
-                                  <a:latin typeface="Cambria Math" panose="02040503050406030204" pitchFamily="18" charset="0"/>
-                                </a:rPr>
-                                <m:t> </m:t>
-                              </m:r>
-                              <m:r>
-                                <m:rPr>
-                                  <m:nor/>
-                                </m:rPr>
-                                <a:rPr lang="pt-BR" i="0">
-                                  <a:latin typeface="Cambria Math" panose="02040503050406030204" pitchFamily="18" charset="0"/>
-                                </a:rPr>
-                                <m:t>casado</m:t>
+                                <m:t>  não casado</m:t>
                               </m:r>
                             </m:sub>
                             <m:sup>
@@ -25753,7 +24730,7 @@
             </p:txBody>
           </p:sp>
         </mc:Choice>
-        <mc:Fallback>
+        <mc:Fallback xmlns="">
           <p:sp>
             <p:nvSpPr>
               <p:cNvPr id="14" name="CaixaDeTexto 13">
@@ -40807,20 +39784,20 @@
 </file>
 
 <file path=customXml/item2.xml><?xml version="1.0" encoding="utf-8"?>
-<p:properties xmlns:p="http://schemas.microsoft.com/office/2006/metadata/properties" xmlns:xsi="http://www.w3.org/2001/XMLSchema-instance" xmlns:pc="http://schemas.microsoft.com/office/infopath/2007/PartnerControls">
-  <documentManagement>
-    <_activity xmlns="1ea3c9c0-e698-4ea3-9529-a2c71b2c9eef" xsi:nil="true"/>
-  </documentManagement>
-</p:properties>
-</file>
-
-<file path=customXml/item3.xml><?xml version="1.0" encoding="utf-8"?>
 <?mso-contentType ?>
 <FormTemplates xmlns="http://schemas.microsoft.com/sharepoint/v3/contenttype/forms">
   <Display>DocumentLibraryForm</Display>
   <Edit>DocumentLibraryForm</Edit>
   <New>DocumentLibraryForm</New>
 </FormTemplates>
+</file>
+
+<file path=customXml/item3.xml><?xml version="1.0" encoding="utf-8"?>
+<p:properties xmlns:p="http://schemas.microsoft.com/office/2006/metadata/properties" xmlns:xsi="http://www.w3.org/2001/XMLSchema-instance" xmlns:pc="http://schemas.microsoft.com/office/infopath/2007/PartnerControls">
+  <documentManagement>
+    <_activity xmlns="1ea3c9c0-e698-4ea3-9529-a2c71b2c9eef" xsi:nil="true"/>
+  </documentManagement>
+</p:properties>
 </file>
 
 <file path=customXml/itemProps1.xml><?xml version="1.0" encoding="utf-8"?>
@@ -40843,6 +39820,14 @@
 </file>
 
 <file path=customXml/itemProps2.xml><?xml version="1.0" encoding="utf-8"?>
+<ds:datastoreItem xmlns:ds="http://schemas.openxmlformats.org/officeDocument/2006/customXml" ds:itemID="{ED4652CD-F36D-4B45-A152-BCD8A2661B41}">
+  <ds:schemaRefs>
+    <ds:schemaRef ds:uri="http://schemas.microsoft.com/sharepoint/v3/contenttype/forms"/>
+  </ds:schemaRefs>
+</ds:datastoreItem>
+</file>
+
+<file path=customXml/itemProps3.xml><?xml version="1.0" encoding="utf-8"?>
 <ds:datastoreItem xmlns:ds="http://schemas.openxmlformats.org/officeDocument/2006/customXml" ds:itemID="{D91E0874-EAAB-4A60-8F28-27A437EC07BB}">
   <ds:schemaRefs>
     <ds:schemaRef ds:uri="http://schemas.microsoft.com/office/2006/metadata/properties"/>
@@ -40850,12 +39835,4 @@
     <ds:schemaRef ds:uri="1ea3c9c0-e698-4ea3-9529-a2c71b2c9eef"/>
   </ds:schemaRefs>
 </ds:datastoreItem>
-</file>
-
-<file path=customXml/itemProps3.xml><?xml version="1.0" encoding="utf-8"?>
-<ds:datastoreItem xmlns:ds="http://schemas.openxmlformats.org/officeDocument/2006/customXml" ds:itemID="{ED4652CD-F36D-4B45-A152-BCD8A2661B41}">
-  <ds:schemaRefs>
-    <ds:schemaRef ds:uri="http://schemas.microsoft.com/sharepoint/v3/contenttype/forms"/>
-  </ds:schemaRefs>
-</ds:datastoreItem>
 </file>